--- a/docs/Submission Template _ AI Builder Cup.pptx
+++ b/docs/Submission Template _ AI Builder Cup.pptx
@@ -7374,6 +7374,2361 @@
           </a:p>
         </p:txBody>
       </p:sp>
+      <p:sp>
+        <p:nvSpPr>
+          <p:cNvPr id="128" name="Cost scope"/>
+          <p:cNvSpPr txBox="1"/>
+          <p:nvPr/>
+        </p:nvSpPr>
+        <p:spPr>
+          <a:xfrm>
+            <a:off x="347472" y="1033271"/>
+            <a:ext cx="8449056" cy="182880"/>
+          </a:xfrm>
+          <a:prstGeom prst="rect">
+            <a:avLst/>
+          </a:prstGeom>
+          <a:noFill/>
+        </p:spPr>
+        <p:txBody>
+          <a:bodyPr wrap="square" anchor="t" lIns="0" rIns="0" tIns="0" bIns="0">
+            <a:spAutoFit/>
+          </a:bodyPr>
+          <a:lstStyle/>
+          <a:p>
+            <a:pPr algn="l"/>
+            <a:r>
+              <a:rPr sz="750" b="0">
+                <a:solidFill>
+                  <a:srgbClr val="5F6368"/>
+                </a:solidFill>
+                <a:latin typeface="Google Sans Flex"/>
+              </a:rPr>
+              <a:t>AI cost measured per action by our evaluation; infrastructure at Google Cloud's list prices for asia-southeast1 (Cloud Billing Catalog, Oct 2026). USD.</a:t>
+            </a:r>
+          </a:p>
+        </p:txBody>
+      </p:sp>
+      <p:sp>
+        <p:nvSpPr>
+          <p:cNvPr id="129" name="KPI 1"/>
+          <p:cNvSpPr/>
+          <p:nvPr/>
+        </p:nvSpPr>
+        <p:spPr>
+          <a:xfrm>
+            <a:off x="347472" y="1261872"/>
+            <a:ext cx="2009394" cy="786384"/>
+          </a:xfrm>
+          <a:prstGeom prst="roundRect">
+            <a:avLst>
+              <a:gd name="adj" fmla="val 8000"/>
+            </a:avLst>
+          </a:prstGeom>
+          <a:solidFill>
+            <a:srgbClr val="F1F3F4"/>
+          </a:solidFill>
+          <a:ln>
+            <a:noFill/>
+          </a:ln>
+        </p:spPr>
+        <p:txBody>
+          <a:bodyPr rtlCol="0" anchor="t" wrap="square" lIns="82296" rIns="82296" tIns="82296" bIns="82296"/>
+          <a:lstStyle/>
+          <a:p>
+            <a:pPr algn="l"/>
+            <a:r>
+              <a:rPr sz="1700" b="0">
+                <a:solidFill>
+                  <a:srgbClr val="1A73E8"/>
+                </a:solidFill>
+                <a:latin typeface="Google Sans Flex Medium"/>
+              </a:rPr>
+              <a:t>$0.014</a:t>
+            </a:r>
+          </a:p>
+          <a:p>
+            <a:pPr algn="l"/>
+            <a:r>
+              <a:rPr sz="850" b="0">
+                <a:solidFill>
+                  <a:srgbClr val="202124"/>
+                </a:solidFill>
+                <a:latin typeface="Google Sans Flex Medium"/>
+              </a:rPr>
+              <a:t>Gemini per order</a:t>
+            </a:r>
+          </a:p>
+          <a:p>
+            <a:pPr algn="l"/>
+            <a:r>
+              <a:rPr sz="700" b="0">
+                <a:solidFill>
+                  <a:srgbClr val="5F6368"/>
+                </a:solidFill>
+                <a:latin typeface="Google Sans Flex"/>
+              </a:rPr>
+              <a:t>draft with checks, one receipt read, one packing check</a:t>
+            </a:r>
+          </a:p>
+        </p:txBody>
+      </p:sp>
+      <p:sp>
+        <p:nvSpPr>
+          <p:cNvPr id="130" name="KPI 2"/>
+          <p:cNvSpPr/>
+          <p:nvPr/>
+        </p:nvSpPr>
+        <p:spPr>
+          <a:xfrm>
+            <a:off x="2494026" y="1261872"/>
+            <a:ext cx="2009394" cy="786384"/>
+          </a:xfrm>
+          <a:prstGeom prst="roundRect">
+            <a:avLst>
+              <a:gd name="adj" fmla="val 8000"/>
+            </a:avLst>
+          </a:prstGeom>
+          <a:solidFill>
+            <a:srgbClr val="F1F3F4"/>
+          </a:solidFill>
+          <a:ln>
+            <a:noFill/>
+          </a:ln>
+        </p:spPr>
+        <p:txBody>
+          <a:bodyPr rtlCol="0" anchor="t" wrap="square" lIns="82296" rIns="82296" tIns="82296" bIns="82296"/>
+          <a:lstStyle/>
+          <a:p>
+            <a:pPr algn="l"/>
+            <a:r>
+              <a:rPr sz="1700" b="0">
+                <a:solidFill>
+                  <a:srgbClr val="1A73E8"/>
+                </a:solidFill>
+                <a:latin typeface="Google Sans Flex Medium"/>
+              </a:rPr>
+              <a:t>$13.6</a:t>
+            </a:r>
+          </a:p>
+          <a:p>
+            <a:pPr algn="l"/>
+            <a:r>
+              <a:rPr sz="850" b="0">
+                <a:solidFill>
+                  <a:srgbClr val="202124"/>
+                </a:solidFill>
+                <a:latin typeface="Google Sans Flex Medium"/>
+              </a:rPr>
+              <a:t>a month, always-warm server</a:t>
+            </a:r>
+          </a:p>
+          <a:p>
+            <a:pPr algn="l"/>
+            <a:r>
+              <a:rPr sz="700" b="0">
+                <a:solidFill>
+                  <a:srgbClr val="5F6368"/>
+                </a:solidFill>
+                <a:latin typeface="Google Sans Flex"/>
+              </a:rPr>
+              <a:t>one Cloud Run instance idle at Tier 2 rates; $0 if it scales to zero</a:t>
+            </a:r>
+          </a:p>
+        </p:txBody>
+      </p:sp>
+      <p:sp>
+        <p:nvSpPr>
+          <p:cNvPr id="131" name="KPI 3"/>
+          <p:cNvSpPr/>
+          <p:nvPr/>
+        </p:nvSpPr>
+        <p:spPr>
+          <a:xfrm>
+            <a:off x="4640580" y="1261872"/>
+            <a:ext cx="2009394" cy="786384"/>
+          </a:xfrm>
+          <a:prstGeom prst="roundRect">
+            <a:avLst>
+              <a:gd name="adj" fmla="val 8000"/>
+            </a:avLst>
+          </a:prstGeom>
+          <a:solidFill>
+            <a:srgbClr val="F1F3F4"/>
+          </a:solidFill>
+          <a:ln>
+            <a:noFill/>
+          </a:ln>
+        </p:spPr>
+        <p:txBody>
+          <a:bodyPr rtlCol="0" anchor="t" wrap="square" lIns="82296" rIns="82296" tIns="82296" bIns="82296"/>
+          <a:lstStyle/>
+          <a:p>
+            <a:pPr algn="l"/>
+            <a:r>
+              <a:rPr sz="1700" b="0">
+                <a:solidFill>
+                  <a:srgbClr val="188038"/>
+                </a:solidFill>
+                <a:latin typeface="Google Sans Flex Medium"/>
+              </a:rPr>
+              <a:t>~$19</a:t>
+            </a:r>
+          </a:p>
+          <a:p>
+            <a:pPr algn="l"/>
+            <a:r>
+              <a:rPr sz="850" b="0">
+                <a:solidFill>
+                  <a:srgbClr val="202124"/>
+                </a:solidFill>
+                <a:latin typeface="Google Sans Flex Medium"/>
+              </a:rPr>
+              <a:t>a month at 300 orders</a:t>
+            </a:r>
+          </a:p>
+          <a:p>
+            <a:pPr algn="l"/>
+            <a:r>
+              <a:rPr sz="700" b="0">
+                <a:solidFill>
+                  <a:srgbClr val="5F6368"/>
+                </a:solidFill>
+                <a:latin typeface="Google Sans Flex"/>
+              </a:rPr>
+              <a:t>a small seller: AI with re-checks and claims, plus the warm instance</a:t>
+            </a:r>
+          </a:p>
+        </p:txBody>
+      </p:sp>
+      <p:sp>
+        <p:nvSpPr>
+          <p:cNvPr id="132" name="KPI 4"/>
+          <p:cNvSpPr/>
+          <p:nvPr/>
+        </p:nvSpPr>
+        <p:spPr>
+          <a:xfrm>
+            <a:off x="6787134" y="1261872"/>
+            <a:ext cx="2009394" cy="786384"/>
+          </a:xfrm>
+          <a:prstGeom prst="roundRect">
+            <a:avLst>
+              <a:gd name="adj" fmla="val 8000"/>
+            </a:avLst>
+          </a:prstGeom>
+          <a:solidFill>
+            <a:srgbClr val="F1F3F4"/>
+          </a:solidFill>
+          <a:ln>
+            <a:noFill/>
+          </a:ln>
+        </p:spPr>
+        <p:txBody>
+          <a:bodyPr rtlCol="0" anchor="t" wrap="square" lIns="82296" rIns="82296" tIns="82296" bIns="82296"/>
+          <a:lstStyle/>
+          <a:p>
+            <a:pPr algn="l"/>
+            <a:r>
+              <a:rPr sz="1700" b="0">
+                <a:solidFill>
+                  <a:srgbClr val="5F6368"/>
+                </a:solidFill>
+                <a:latin typeface="Google Sans Flex Medium"/>
+              </a:rPr>
+              <a:t>$30</a:t>
+            </a:r>
+          </a:p>
+          <a:p>
+            <a:pPr algn="l"/>
+            <a:r>
+              <a:rPr sz="850" b="0">
+                <a:solidFill>
+                  <a:srgbClr val="202124"/>
+                </a:solidFill>
+                <a:latin typeface="Google Sans Flex Medium"/>
+              </a:rPr>
+              <a:t>a day, demo ceiling</a:t>
+            </a:r>
+          </a:p>
+          <a:p>
+            <a:pPr algn="l"/>
+            <a:r>
+              <a:rPr sz="700" b="0">
+                <a:solidFill>
+                  <a:srgbClr val="5F6368"/>
+                </a:solidFill>
+                <a:latin typeface="Google Sans Flex"/>
+              </a:rPr>
+              <a:t>5,000 AI calls a day for all demo visitors, 250 each</a:t>
+            </a:r>
+          </a:p>
+        </p:txBody>
+      </p:sp>
+      <p:sp>
+        <p:nvSpPr>
+          <p:cNvPr id="133" name="Per action heading"/>
+          <p:cNvSpPr txBox="1"/>
+          <p:nvPr/>
+        </p:nvSpPr>
+        <p:spPr>
+          <a:xfrm>
+            <a:off x="347472" y="2212848"/>
+            <a:ext cx="4023360" cy="182880"/>
+          </a:xfrm>
+          <a:prstGeom prst="rect">
+            <a:avLst/>
+          </a:prstGeom>
+          <a:noFill/>
+        </p:spPr>
+        <p:txBody>
+          <a:bodyPr wrap="square" anchor="t" lIns="0" rIns="0" tIns="0" bIns="0">
+            <a:spAutoFit/>
+          </a:bodyPr>
+          <a:lstStyle/>
+          <a:p>
+            <a:pPr algn="l"/>
+            <a:r>
+              <a:rPr sz="950" b="0">
+                <a:solidFill>
+                  <a:srgbClr val="202124"/>
+                </a:solidFill>
+                <a:latin typeface="Google Sans Flex Medium"/>
+              </a:rPr>
+              <a:t>AI cost per action</a:t>
+            </a:r>
+            <a:r>
+              <a:rPr sz="750" b="0">
+                <a:solidFill>
+                  <a:srgbClr val="5F6368"/>
+                </a:solidFill>
+                <a:latin typeface="Google Sans Flex"/>
+              </a:rPr>
+              <a:t>  ·  measured, median</a:t>
+            </a:r>
+          </a:p>
+        </p:txBody>
+      </p:sp>
+      <p:graphicFrame>
+        <p:nvGraphicFramePr>
+          <p:cNvPr id="134" name="Per action table"/>
+          <p:cNvGraphicFramePr>
+            <a:graphicFrameLocks noGrp="1"/>
+          </p:cNvGraphicFramePr>
+          <p:nvPr/>
+        </p:nvGraphicFramePr>
+        <p:xfrm>
+          <a:off x="347472" y="2423160"/>
+          <a:ext cx="3749040" cy="1179576"/>
+        </p:xfrm>
+        <a:graphic>
+          <a:graphicData uri="http://schemas.openxmlformats.org/drawingml/2006/table">
+            <a:tbl>
+              <a:tblPr firstRow="1" bandRow="0"/>
+              <a:tblGrid>
+                <a:gridCol w="1783080"/>
+                <a:gridCol w="502920"/>
+                <a:gridCol w="777240"/>
+                <a:gridCol w="685800"/>
+              </a:tblGrid>
+              <a:tr h="196596">
+                <a:tc>
+                  <a:txBody>
+                    <a:bodyPr wrap="square"/>
+                    <a:lstStyle/>
+                    <a:p>
+                      <a:pPr algn="l">
+                        <a:defRPr sz="750"/>
+                      </a:pPr>
+                      <a:r>
+                        <a:rPr sz="750" b="0">
+                          <a:solidFill>
+                            <a:srgbClr val="5F6368"/>
+                          </a:solidFill>
+                          <a:latin typeface="Google Sans Flex"/>
+                        </a:rPr>
+                        <a:t>Action</a:t>
+                      </a:r>
+                    </a:p>
+                  </a:txBody>
+                  <a:tcPr marL="45720" marR="45720" marT="9144" marB="9144" anchor="ctr">
+                    <a:solidFill>
+                      <a:srgbClr val="F1F3F4"/>
+                    </a:solidFill>
+                    <a:lnL w="0">
+                      <a:noFill/>
+                    </a:lnL>
+                    <a:lnR w="0">
+                      <a:noFill/>
+                    </a:lnR>
+                    <a:lnT w="0">
+                      <a:noFill/>
+                    </a:lnT>
+                    <a:lnB w="6350">
+                      <a:solidFill>
+                        <a:srgbClr val="DADCE0"/>
+                      </a:solidFill>
+                    </a:lnB>
+                  </a:tcPr>
+                </a:tc>
+                <a:tc>
+                  <a:txBody>
+                    <a:bodyPr wrap="square"/>
+                    <a:lstStyle/>
+                    <a:p>
+                      <a:pPr algn="r">
+                        <a:defRPr sz="750"/>
+                      </a:pPr>
+                      <a:r>
+                        <a:rPr sz="750" b="0">
+                          <a:solidFill>
+                            <a:srgbClr val="5F6368"/>
+                          </a:solidFill>
+                          <a:latin typeface="Google Sans Flex"/>
+                        </a:rPr>
+                        <a:t>Calls</a:t>
+                      </a:r>
+                    </a:p>
+                  </a:txBody>
+                  <a:tcPr marL="45720" marR="45720" marT="9144" marB="9144" anchor="ctr">
+                    <a:solidFill>
+                      <a:srgbClr val="F1F3F4"/>
+                    </a:solidFill>
+                    <a:lnL w="0">
+                      <a:noFill/>
+                    </a:lnL>
+                    <a:lnR w="0">
+                      <a:noFill/>
+                    </a:lnR>
+                    <a:lnT w="0">
+                      <a:noFill/>
+                    </a:lnT>
+                    <a:lnB w="6350">
+                      <a:solidFill>
+                        <a:srgbClr val="DADCE0"/>
+                      </a:solidFill>
+                    </a:lnB>
+                  </a:tcPr>
+                </a:tc>
+                <a:tc>
+                  <a:txBody>
+                    <a:bodyPr wrap="square"/>
+                    <a:lstStyle/>
+                    <a:p>
+                      <a:pPr algn="r">
+                        <a:defRPr sz="750"/>
+                      </a:pPr>
+                      <a:r>
+                        <a:rPr sz="750" b="0">
+                          <a:solidFill>
+                            <a:srgbClr val="5F6368"/>
+                          </a:solidFill>
+                          <a:latin typeface="Google Sans Flex"/>
+                        </a:rPr>
+                        <a:t>Tokens</a:t>
+                      </a:r>
+                    </a:p>
+                  </a:txBody>
+                  <a:tcPr marL="45720" marR="45720" marT="9144" marB="9144" anchor="ctr">
+                    <a:solidFill>
+                      <a:srgbClr val="F1F3F4"/>
+                    </a:solidFill>
+                    <a:lnL w="0">
+                      <a:noFill/>
+                    </a:lnL>
+                    <a:lnR w="0">
+                      <a:noFill/>
+                    </a:lnR>
+                    <a:lnT w="0">
+                      <a:noFill/>
+                    </a:lnT>
+                    <a:lnB w="6350">
+                      <a:solidFill>
+                        <a:srgbClr val="DADCE0"/>
+                      </a:solidFill>
+                    </a:lnB>
+                  </a:tcPr>
+                </a:tc>
+                <a:tc>
+                  <a:txBody>
+                    <a:bodyPr wrap="square"/>
+                    <a:lstStyle/>
+                    <a:p>
+                      <a:pPr algn="r">
+                        <a:defRPr sz="750"/>
+                      </a:pPr>
+                      <a:r>
+                        <a:rPr sz="750" b="0">
+                          <a:solidFill>
+                            <a:srgbClr val="5F6368"/>
+                          </a:solidFill>
+                          <a:latin typeface="Google Sans Flex"/>
+                        </a:rPr>
+                        <a:t>Cost</a:t>
+                      </a:r>
+                    </a:p>
+                  </a:txBody>
+                  <a:tcPr marL="45720" marR="45720" marT="9144" marB="9144" anchor="ctr">
+                    <a:solidFill>
+                      <a:srgbClr val="F1F3F4"/>
+                    </a:solidFill>
+                    <a:lnL w="0">
+                      <a:noFill/>
+                    </a:lnL>
+                    <a:lnR w="0">
+                      <a:noFill/>
+                    </a:lnR>
+                    <a:lnT w="0">
+                      <a:noFill/>
+                    </a:lnT>
+                    <a:lnB w="6350">
+                      <a:solidFill>
+                        <a:srgbClr val="DADCE0"/>
+                      </a:solidFill>
+                    </a:lnB>
+                  </a:tcPr>
+                </a:tc>
+              </a:tr>
+              <a:tr h="196596">
+                <a:tc>
+                  <a:txBody>
+                    <a:bodyPr wrap="square"/>
+                    <a:lstStyle/>
+                    <a:p>
+                      <a:pPr algn="l">
+                        <a:defRPr sz="800"/>
+                      </a:pPr>
+                      <a:r>
+                        <a:rPr sz="800" b="0">
+                          <a:solidFill>
+                            <a:srgbClr val="202124"/>
+                          </a:solidFill>
+                          <a:latin typeface="Google Sans Flex"/>
+                        </a:rPr>
+                        <a:t>Draft order + checks</a:t>
+                      </a:r>
+                    </a:p>
+                  </a:txBody>
+                  <a:tcPr marL="45720" marR="45720" marT="9144" marB="9144" anchor="ctr">
+                    <a:solidFill>
+                      <a:srgbClr val="FFFFFF"/>
+                    </a:solidFill>
+                    <a:lnL w="0">
+                      <a:noFill/>
+                    </a:lnL>
+                    <a:lnR w="0">
+                      <a:noFill/>
+                    </a:lnR>
+                    <a:lnT w="0">
+                      <a:noFill/>
+                    </a:lnT>
+                    <a:lnB w="6350">
+                      <a:solidFill>
+                        <a:srgbClr val="DADCE0"/>
+                      </a:solidFill>
+                    </a:lnB>
+                  </a:tcPr>
+                </a:tc>
+                <a:tc>
+                  <a:txBody>
+                    <a:bodyPr wrap="square"/>
+                    <a:lstStyle/>
+                    <a:p>
+                      <a:pPr algn="r">
+                        <a:defRPr sz="800"/>
+                      </a:pPr>
+                      <a:r>
+                        <a:rPr sz="800" b="0">
+                          <a:solidFill>
+                            <a:srgbClr val="202124"/>
+                          </a:solidFill>
+                          <a:latin typeface="Google Sans Flex"/>
+                        </a:rPr>
+                        <a:t>2</a:t>
+                      </a:r>
+                    </a:p>
+                  </a:txBody>
+                  <a:tcPr marL="45720" marR="45720" marT="9144" marB="9144" anchor="ctr">
+                    <a:solidFill>
+                      <a:srgbClr val="FFFFFF"/>
+                    </a:solidFill>
+                    <a:lnL w="0">
+                      <a:noFill/>
+                    </a:lnL>
+                    <a:lnR w="0">
+                      <a:noFill/>
+                    </a:lnR>
+                    <a:lnT w="0">
+                      <a:noFill/>
+                    </a:lnT>
+                    <a:lnB w="6350">
+                      <a:solidFill>
+                        <a:srgbClr val="DADCE0"/>
+                      </a:solidFill>
+                    </a:lnB>
+                  </a:tcPr>
+                </a:tc>
+                <a:tc>
+                  <a:txBody>
+                    <a:bodyPr wrap="square"/>
+                    <a:lstStyle/>
+                    <a:p>
+                      <a:pPr algn="r">
+                        <a:defRPr sz="800"/>
+                      </a:pPr>
+                      <a:r>
+                        <a:rPr sz="800" b="0">
+                          <a:solidFill>
+                            <a:srgbClr val="202124"/>
+                          </a:solidFill>
+                          <a:latin typeface="Google Sans Flex"/>
+                        </a:rPr>
+                        <a:t>2,638</a:t>
+                      </a:r>
+                    </a:p>
+                  </a:txBody>
+                  <a:tcPr marL="45720" marR="45720" marT="9144" marB="9144" anchor="ctr">
+                    <a:solidFill>
+                      <a:srgbClr val="FFFFFF"/>
+                    </a:solidFill>
+                    <a:lnL w="0">
+                      <a:noFill/>
+                    </a:lnL>
+                    <a:lnR w="0">
+                      <a:noFill/>
+                    </a:lnR>
+                    <a:lnT w="0">
+                      <a:noFill/>
+                    </a:lnT>
+                    <a:lnB w="6350">
+                      <a:solidFill>
+                        <a:srgbClr val="DADCE0"/>
+                      </a:solidFill>
+                    </a:lnB>
+                  </a:tcPr>
+                </a:tc>
+                <a:tc>
+                  <a:txBody>
+                    <a:bodyPr wrap="square"/>
+                    <a:lstStyle/>
+                    <a:p>
+                      <a:pPr algn="r">
+                        <a:defRPr sz="800"/>
+                      </a:pPr>
+                      <a:r>
+                        <a:rPr sz="800" b="1">
+                          <a:solidFill>
+                            <a:srgbClr val="188038"/>
+                          </a:solidFill>
+                          <a:latin typeface="Google Sans Flex"/>
+                        </a:rPr>
+                        <a:t>$0.0057</a:t>
+                      </a:r>
+                    </a:p>
+                  </a:txBody>
+                  <a:tcPr marL="45720" marR="45720" marT="9144" marB="9144" anchor="ctr">
+                    <a:solidFill>
+                      <a:srgbClr val="FFFFFF"/>
+                    </a:solidFill>
+                    <a:lnL w="0">
+                      <a:noFill/>
+                    </a:lnL>
+                    <a:lnR w="0">
+                      <a:noFill/>
+                    </a:lnR>
+                    <a:lnT w="0">
+                      <a:noFill/>
+                    </a:lnT>
+                    <a:lnB w="6350">
+                      <a:solidFill>
+                        <a:srgbClr val="DADCE0"/>
+                      </a:solidFill>
+                    </a:lnB>
+                  </a:tcPr>
+                </a:tc>
+              </a:tr>
+              <a:tr h="196596">
+                <a:tc>
+                  <a:txBody>
+                    <a:bodyPr wrap="square"/>
+                    <a:lstStyle/>
+                    <a:p>
+                      <a:pPr algn="l">
+                        <a:defRPr sz="800"/>
+                      </a:pPr>
+                      <a:r>
+                        <a:rPr sz="800" b="0">
+                          <a:solidFill>
+                            <a:srgbClr val="202124"/>
+                          </a:solidFill>
+                          <a:latin typeface="Google Sans Flex"/>
+                        </a:rPr>
+                        <a:t>GCash receipt read</a:t>
+                      </a:r>
+                    </a:p>
+                  </a:txBody>
+                  <a:tcPr marL="45720" marR="45720" marT="9144" marB="9144" anchor="ctr">
+                    <a:solidFill>
+                      <a:srgbClr val="FFFFFF"/>
+                    </a:solidFill>
+                    <a:lnL w="0">
+                      <a:noFill/>
+                    </a:lnL>
+                    <a:lnR w="0">
+                      <a:noFill/>
+                    </a:lnR>
+                    <a:lnT w="0">
+                      <a:noFill/>
+                    </a:lnT>
+                    <a:lnB w="6350">
+                      <a:solidFill>
+                        <a:srgbClr val="DADCE0"/>
+                      </a:solidFill>
+                    </a:lnB>
+                  </a:tcPr>
+                </a:tc>
+                <a:tc>
+                  <a:txBody>
+                    <a:bodyPr wrap="square"/>
+                    <a:lstStyle/>
+                    <a:p>
+                      <a:pPr algn="r">
+                        <a:defRPr sz="800"/>
+                      </a:pPr>
+                      <a:r>
+                        <a:rPr sz="800" b="0">
+                          <a:solidFill>
+                            <a:srgbClr val="202124"/>
+                          </a:solidFill>
+                          <a:latin typeface="Google Sans Flex"/>
+                        </a:rPr>
+                        <a:t>1</a:t>
+                      </a:r>
+                    </a:p>
+                  </a:txBody>
+                  <a:tcPr marL="45720" marR="45720" marT="9144" marB="9144" anchor="ctr">
+                    <a:solidFill>
+                      <a:srgbClr val="FFFFFF"/>
+                    </a:solidFill>
+                    <a:lnL w="0">
+                      <a:noFill/>
+                    </a:lnL>
+                    <a:lnR w="0">
+                      <a:noFill/>
+                    </a:lnR>
+                    <a:lnT w="0">
+                      <a:noFill/>
+                    </a:lnT>
+                    <a:lnB w="6350">
+                      <a:solidFill>
+                        <a:srgbClr val="DADCE0"/>
+                      </a:solidFill>
+                    </a:lnB>
+                  </a:tcPr>
+                </a:tc>
+                <a:tc>
+                  <a:txBody>
+                    <a:bodyPr wrap="square"/>
+                    <a:lstStyle/>
+                    <a:p>
+                      <a:pPr algn="r">
+                        <a:defRPr sz="800"/>
+                      </a:pPr>
+                      <a:r>
+                        <a:rPr sz="800" b="0">
+                          <a:solidFill>
+                            <a:srgbClr val="202124"/>
+                          </a:solidFill>
+                          <a:latin typeface="Google Sans Flex"/>
+                        </a:rPr>
+                        <a:t>1,918</a:t>
+                      </a:r>
+                    </a:p>
+                  </a:txBody>
+                  <a:tcPr marL="45720" marR="45720" marT="9144" marB="9144" anchor="ctr">
+                    <a:solidFill>
+                      <a:srgbClr val="FFFFFF"/>
+                    </a:solidFill>
+                    <a:lnL w="0">
+                      <a:noFill/>
+                    </a:lnL>
+                    <a:lnR w="0">
+                      <a:noFill/>
+                    </a:lnR>
+                    <a:lnT w="0">
+                      <a:noFill/>
+                    </a:lnT>
+                    <a:lnB w="6350">
+                      <a:solidFill>
+                        <a:srgbClr val="DADCE0"/>
+                      </a:solidFill>
+                    </a:lnB>
+                  </a:tcPr>
+                </a:tc>
+                <a:tc>
+                  <a:txBody>
+                    <a:bodyPr wrap="square"/>
+                    <a:lstStyle/>
+                    <a:p>
+                      <a:pPr algn="r">
+                        <a:defRPr sz="800"/>
+                      </a:pPr>
+                      <a:r>
+                        <a:rPr sz="800" b="1">
+                          <a:solidFill>
+                            <a:srgbClr val="188038"/>
+                          </a:solidFill>
+                          <a:latin typeface="Google Sans Flex"/>
+                        </a:rPr>
+                        <a:t>$0.0044</a:t>
+                      </a:r>
+                    </a:p>
+                  </a:txBody>
+                  <a:tcPr marL="45720" marR="45720" marT="9144" marB="9144" anchor="ctr">
+                    <a:solidFill>
+                      <a:srgbClr val="FFFFFF"/>
+                    </a:solidFill>
+                    <a:lnL w="0">
+                      <a:noFill/>
+                    </a:lnL>
+                    <a:lnR w="0">
+                      <a:noFill/>
+                    </a:lnR>
+                    <a:lnT w="0">
+                      <a:noFill/>
+                    </a:lnT>
+                    <a:lnB w="6350">
+                      <a:solidFill>
+                        <a:srgbClr val="DADCE0"/>
+                      </a:solidFill>
+                    </a:lnB>
+                  </a:tcPr>
+                </a:tc>
+              </a:tr>
+              <a:tr h="196596">
+                <a:tc>
+                  <a:txBody>
+                    <a:bodyPr wrap="square"/>
+                    <a:lstStyle/>
+                    <a:p>
+                      <a:pPr algn="l">
+                        <a:defRPr sz="800"/>
+                      </a:pPr>
+                      <a:r>
+                        <a:rPr sz="800" b="0">
+                          <a:solidFill>
+                            <a:srgbClr val="202124"/>
+                          </a:solidFill>
+                          <a:latin typeface="Google Sans Flex"/>
+                        </a:rPr>
+                        <a:t>Packing photo check</a:t>
+                      </a:r>
+                    </a:p>
+                  </a:txBody>
+                  <a:tcPr marL="45720" marR="45720" marT="9144" marB="9144" anchor="ctr">
+                    <a:solidFill>
+                      <a:srgbClr val="FFFFFF"/>
+                    </a:solidFill>
+                    <a:lnL w="0">
+                      <a:noFill/>
+                    </a:lnL>
+                    <a:lnR w="0">
+                      <a:noFill/>
+                    </a:lnR>
+                    <a:lnT w="0">
+                      <a:noFill/>
+                    </a:lnT>
+                    <a:lnB w="6350">
+                      <a:solidFill>
+                        <a:srgbClr val="DADCE0"/>
+                      </a:solidFill>
+                    </a:lnB>
+                  </a:tcPr>
+                </a:tc>
+                <a:tc>
+                  <a:txBody>
+                    <a:bodyPr wrap="square"/>
+                    <a:lstStyle/>
+                    <a:p>
+                      <a:pPr algn="r">
+                        <a:defRPr sz="800"/>
+                      </a:pPr>
+                      <a:r>
+                        <a:rPr sz="800" b="0">
+                          <a:solidFill>
+                            <a:srgbClr val="202124"/>
+                          </a:solidFill>
+                          <a:latin typeface="Google Sans Flex"/>
+                        </a:rPr>
+                        <a:t>1</a:t>
+                      </a:r>
+                    </a:p>
+                  </a:txBody>
+                  <a:tcPr marL="45720" marR="45720" marT="9144" marB="9144" anchor="ctr">
+                    <a:solidFill>
+                      <a:srgbClr val="FFFFFF"/>
+                    </a:solidFill>
+                    <a:lnL w="0">
+                      <a:noFill/>
+                    </a:lnL>
+                    <a:lnR w="0">
+                      <a:noFill/>
+                    </a:lnR>
+                    <a:lnT w="0">
+                      <a:noFill/>
+                    </a:lnT>
+                    <a:lnB w="6350">
+                      <a:solidFill>
+                        <a:srgbClr val="DADCE0"/>
+                      </a:solidFill>
+                    </a:lnB>
+                  </a:tcPr>
+                </a:tc>
+                <a:tc>
+                  <a:txBody>
+                    <a:bodyPr wrap="square"/>
+                    <a:lstStyle/>
+                    <a:p>
+                      <a:pPr algn="r">
+                        <a:defRPr sz="800"/>
+                      </a:pPr>
+                      <a:r>
+                        <a:rPr sz="800" b="0">
+                          <a:solidFill>
+                            <a:srgbClr val="202124"/>
+                          </a:solidFill>
+                          <a:latin typeface="Google Sans Flex"/>
+                        </a:rPr>
+                        <a:t>2,050</a:t>
+                      </a:r>
+                    </a:p>
+                  </a:txBody>
+                  <a:tcPr marL="45720" marR="45720" marT="9144" marB="9144" anchor="ctr">
+                    <a:solidFill>
+                      <a:srgbClr val="FFFFFF"/>
+                    </a:solidFill>
+                    <a:lnL w="0">
+                      <a:noFill/>
+                    </a:lnL>
+                    <a:lnR w="0">
+                      <a:noFill/>
+                    </a:lnR>
+                    <a:lnT w="0">
+                      <a:noFill/>
+                    </a:lnT>
+                    <a:lnB w="6350">
+                      <a:solidFill>
+                        <a:srgbClr val="DADCE0"/>
+                      </a:solidFill>
+                    </a:lnB>
+                  </a:tcPr>
+                </a:tc>
+                <a:tc>
+                  <a:txBody>
+                    <a:bodyPr wrap="square"/>
+                    <a:lstStyle/>
+                    <a:p>
+                      <a:pPr algn="r">
+                        <a:defRPr sz="800"/>
+                      </a:pPr>
+                      <a:r>
+                        <a:rPr sz="800" b="1">
+                          <a:solidFill>
+                            <a:srgbClr val="188038"/>
+                          </a:solidFill>
+                          <a:latin typeface="Google Sans Flex"/>
+                        </a:rPr>
+                        <a:t>$0.0041</a:t>
+                      </a:r>
+                    </a:p>
+                  </a:txBody>
+                  <a:tcPr marL="45720" marR="45720" marT="9144" marB="9144" anchor="ctr">
+                    <a:solidFill>
+                      <a:srgbClr val="FFFFFF"/>
+                    </a:solidFill>
+                    <a:lnL w="0">
+                      <a:noFill/>
+                    </a:lnL>
+                    <a:lnR w="0">
+                      <a:noFill/>
+                    </a:lnR>
+                    <a:lnT w="0">
+                      <a:noFill/>
+                    </a:lnT>
+                    <a:lnB w="6350">
+                      <a:solidFill>
+                        <a:srgbClr val="DADCE0"/>
+                      </a:solidFill>
+                    </a:lnB>
+                  </a:tcPr>
+                </a:tc>
+              </a:tr>
+              <a:tr h="196596">
+                <a:tc>
+                  <a:txBody>
+                    <a:bodyPr wrap="square"/>
+                    <a:lstStyle/>
+                    <a:p>
+                      <a:pPr algn="l">
+                        <a:defRPr sz="800"/>
+                      </a:pPr>
+                      <a:r>
+                        <a:rPr sz="800" b="0">
+                          <a:solidFill>
+                            <a:srgbClr val="202124"/>
+                          </a:solidFill>
+                          <a:latin typeface="Google Sans Flex"/>
+                        </a:rPr>
+                        <a:t>Claim review (ADK agent)</a:t>
+                      </a:r>
+                    </a:p>
+                  </a:txBody>
+                  <a:tcPr marL="45720" marR="45720" marT="9144" marB="9144" anchor="ctr">
+                    <a:solidFill>
+                      <a:srgbClr val="FFFFFF"/>
+                    </a:solidFill>
+                    <a:lnL w="0">
+                      <a:noFill/>
+                    </a:lnL>
+                    <a:lnR w="0">
+                      <a:noFill/>
+                    </a:lnR>
+                    <a:lnT w="0">
+                      <a:noFill/>
+                    </a:lnT>
+                    <a:lnB w="6350">
+                      <a:solidFill>
+                        <a:srgbClr val="DADCE0"/>
+                      </a:solidFill>
+                    </a:lnB>
+                  </a:tcPr>
+                </a:tc>
+                <a:tc>
+                  <a:txBody>
+                    <a:bodyPr wrap="square"/>
+                    <a:lstStyle/>
+                    <a:p>
+                      <a:pPr algn="r">
+                        <a:defRPr sz="800"/>
+                      </a:pPr>
+                      <a:r>
+                        <a:rPr sz="800" b="0">
+                          <a:solidFill>
+                            <a:srgbClr val="202124"/>
+                          </a:solidFill>
+                          <a:latin typeface="Google Sans Flex"/>
+                        </a:rPr>
+                        <a:t>2</a:t>
+                      </a:r>
+                    </a:p>
+                  </a:txBody>
+                  <a:tcPr marL="45720" marR="45720" marT="9144" marB="9144" anchor="ctr">
+                    <a:solidFill>
+                      <a:srgbClr val="FFFFFF"/>
+                    </a:solidFill>
+                    <a:lnL w="0">
+                      <a:noFill/>
+                    </a:lnL>
+                    <a:lnR w="0">
+                      <a:noFill/>
+                    </a:lnR>
+                    <a:lnT w="0">
+                      <a:noFill/>
+                    </a:lnT>
+                    <a:lnB w="6350">
+                      <a:solidFill>
+                        <a:srgbClr val="DADCE0"/>
+                      </a:solidFill>
+                    </a:lnB>
+                  </a:tcPr>
+                </a:tc>
+                <a:tc>
+                  <a:txBody>
+                    <a:bodyPr wrap="square"/>
+                    <a:lstStyle/>
+                    <a:p>
+                      <a:pPr algn="r">
+                        <a:defRPr sz="800"/>
+                      </a:pPr>
+                      <a:r>
+                        <a:rPr sz="800" b="0">
+                          <a:solidFill>
+                            <a:srgbClr val="202124"/>
+                          </a:solidFill>
+                          <a:latin typeface="Google Sans Flex"/>
+                        </a:rPr>
+                        <a:t>5,965</a:t>
+                      </a:r>
+                    </a:p>
+                  </a:txBody>
+                  <a:tcPr marL="45720" marR="45720" marT="9144" marB="9144" anchor="ctr">
+                    <a:solidFill>
+                      <a:srgbClr val="FFFFFF"/>
+                    </a:solidFill>
+                    <a:lnL w="0">
+                      <a:noFill/>
+                    </a:lnL>
+                    <a:lnR w="0">
+                      <a:noFill/>
+                    </a:lnR>
+                    <a:lnT w="0">
+                      <a:noFill/>
+                    </a:lnT>
+                    <a:lnB w="6350">
+                      <a:solidFill>
+                        <a:srgbClr val="DADCE0"/>
+                      </a:solidFill>
+                    </a:lnB>
+                  </a:tcPr>
+                </a:tc>
+                <a:tc>
+                  <a:txBody>
+                    <a:bodyPr wrap="square"/>
+                    <a:lstStyle/>
+                    <a:p>
+                      <a:pPr algn="r">
+                        <a:defRPr sz="800"/>
+                      </a:pPr>
+                      <a:r>
+                        <a:rPr sz="800" b="1">
+                          <a:solidFill>
+                            <a:srgbClr val="188038"/>
+                          </a:solidFill>
+                          <a:latin typeface="Google Sans Flex"/>
+                        </a:rPr>
+                        <a:t>$0.0123</a:t>
+                      </a:r>
+                    </a:p>
+                  </a:txBody>
+                  <a:tcPr marL="45720" marR="45720" marT="9144" marB="9144" anchor="ctr">
+                    <a:solidFill>
+                      <a:srgbClr val="FFFFFF"/>
+                    </a:solidFill>
+                    <a:lnL w="0">
+                      <a:noFill/>
+                    </a:lnL>
+                    <a:lnR w="0">
+                      <a:noFill/>
+                    </a:lnR>
+                    <a:lnT w="0">
+                      <a:noFill/>
+                    </a:lnT>
+                    <a:lnB w="6350">
+                      <a:solidFill>
+                        <a:srgbClr val="DADCE0"/>
+                      </a:solidFill>
+                    </a:lnB>
+                  </a:tcPr>
+                </a:tc>
+              </a:tr>
+              <a:tr h="196596">
+                <a:tc>
+                  <a:txBody>
+                    <a:bodyPr wrap="square"/>
+                    <a:lstStyle/>
+                    <a:p>
+                      <a:pPr algn="l">
+                        <a:defRPr sz="800"/>
+                      </a:pPr>
+                      <a:r>
+                        <a:rPr sz="800" b="0">
+                          <a:solidFill>
+                            <a:srgbClr val="202124"/>
+                          </a:solidFill>
+                          <a:latin typeface="Google Sans Flex"/>
+                        </a:rPr>
+                        <a:t>Typical order (first three)</a:t>
+                      </a:r>
+                    </a:p>
+                  </a:txBody>
+                  <a:tcPr marL="45720" marR="45720" marT="9144" marB="9144" anchor="ctr">
+                    <a:solidFill>
+                      <a:srgbClr val="FFFFFF"/>
+                    </a:solidFill>
+                    <a:lnL w="0">
+                      <a:noFill/>
+                    </a:lnL>
+                    <a:lnR w="0">
+                      <a:noFill/>
+                    </a:lnR>
+                    <a:lnT w="0">
+                      <a:noFill/>
+                    </a:lnT>
+                    <a:lnB w="6350">
+                      <a:solidFill>
+                        <a:srgbClr val="DADCE0"/>
+                      </a:solidFill>
+                    </a:lnB>
+                  </a:tcPr>
+                </a:tc>
+                <a:tc>
+                  <a:txBody>
+                    <a:bodyPr wrap="square"/>
+                    <a:lstStyle/>
+                    <a:p>
+                      <a:pPr algn="r">
+                        <a:defRPr sz="800"/>
+                      </a:pPr>
+                      <a:r>
+                        <a:rPr sz="800" b="0">
+                          <a:solidFill>
+                            <a:srgbClr val="202124"/>
+                          </a:solidFill>
+                          <a:latin typeface="Google Sans Flex"/>
+                        </a:rPr>
+                        <a:t>4</a:t>
+                      </a:r>
+                    </a:p>
+                  </a:txBody>
+                  <a:tcPr marL="45720" marR="45720" marT="9144" marB="9144" anchor="ctr">
+                    <a:solidFill>
+                      <a:srgbClr val="FFFFFF"/>
+                    </a:solidFill>
+                    <a:lnL w="0">
+                      <a:noFill/>
+                    </a:lnL>
+                    <a:lnR w="0">
+                      <a:noFill/>
+                    </a:lnR>
+                    <a:lnT w="0">
+                      <a:noFill/>
+                    </a:lnT>
+                    <a:lnB w="6350">
+                      <a:solidFill>
+                        <a:srgbClr val="DADCE0"/>
+                      </a:solidFill>
+                    </a:lnB>
+                  </a:tcPr>
+                </a:tc>
+                <a:tc>
+                  <a:txBody>
+                    <a:bodyPr wrap="square"/>
+                    <a:lstStyle/>
+                    <a:p>
+                      <a:pPr algn="r">
+                        <a:defRPr sz="800"/>
+                      </a:pPr>
+                      <a:r>
+                        <a:rPr sz="800" b="0">
+                          <a:solidFill>
+                            <a:srgbClr val="202124"/>
+                          </a:solidFill>
+                          <a:latin typeface="Google Sans Flex"/>
+                        </a:rPr>
+                        <a:t> </a:t>
+                      </a:r>
+                    </a:p>
+                  </a:txBody>
+                  <a:tcPr marL="45720" marR="45720" marT="9144" marB="9144" anchor="ctr">
+                    <a:solidFill>
+                      <a:srgbClr val="FFFFFF"/>
+                    </a:solidFill>
+                    <a:lnL w="0">
+                      <a:noFill/>
+                    </a:lnL>
+                    <a:lnR w="0">
+                      <a:noFill/>
+                    </a:lnR>
+                    <a:lnT w="0">
+                      <a:noFill/>
+                    </a:lnT>
+                    <a:lnB w="6350">
+                      <a:solidFill>
+                        <a:srgbClr val="DADCE0"/>
+                      </a:solidFill>
+                    </a:lnB>
+                  </a:tcPr>
+                </a:tc>
+                <a:tc>
+                  <a:txBody>
+                    <a:bodyPr wrap="square"/>
+                    <a:lstStyle/>
+                    <a:p>
+                      <a:pPr algn="r">
+                        <a:defRPr sz="800"/>
+                      </a:pPr>
+                      <a:r>
+                        <a:rPr sz="800" b="1">
+                          <a:solidFill>
+                            <a:srgbClr val="188038"/>
+                          </a:solidFill>
+                          <a:latin typeface="Google Sans Flex"/>
+                        </a:rPr>
+                        <a:t>$0.0142</a:t>
+                      </a:r>
+                    </a:p>
+                  </a:txBody>
+                  <a:tcPr marL="45720" marR="45720" marT="9144" marB="9144" anchor="ctr">
+                    <a:solidFill>
+                      <a:srgbClr val="FFFFFF"/>
+                    </a:solidFill>
+                    <a:lnL w="0">
+                      <a:noFill/>
+                    </a:lnL>
+                    <a:lnR w="0">
+                      <a:noFill/>
+                    </a:lnR>
+                    <a:lnT w="0">
+                      <a:noFill/>
+                    </a:lnT>
+                    <a:lnB w="6350">
+                      <a:solidFill>
+                        <a:srgbClr val="DADCE0"/>
+                      </a:solidFill>
+                    </a:lnB>
+                  </a:tcPr>
+                </a:tc>
+              </a:tr>
+            </a:tbl>
+          </a:graphicData>
+        </a:graphic>
+      </p:graphicFrame>
+      <p:sp>
+        <p:nvSpPr>
+          <p:cNvPr id="135" name="Per action note"/>
+          <p:cNvSpPr txBox="1"/>
+          <p:nvPr/>
+        </p:nvSpPr>
+        <p:spPr>
+          <a:xfrm>
+            <a:off x="347472" y="3675887"/>
+            <a:ext cx="3749039" cy="502920"/>
+          </a:xfrm>
+          <a:prstGeom prst="rect">
+            <a:avLst/>
+          </a:prstGeom>
+          <a:noFill/>
+        </p:spPr>
+        <p:txBody>
+          <a:bodyPr wrap="square" anchor="t" lIns="0" rIns="0" tIns="0" bIns="0">
+            <a:spAutoFit/>
+          </a:bodyPr>
+          <a:lstStyle/>
+          <a:p>
+            <a:pPr algn="l"/>
+            <a:r>
+              <a:rPr sz="700" b="0">
+                <a:solidFill>
+                  <a:srgbClr val="5F6368"/>
+                </a:solidFill>
+                <a:latin typeface="Google Sans Flex"/>
+              </a:rPr>
+              <a:t>Tokens include Gemini's thinking, at gemini-3.8-flash's list price of $1.50 / $7.50 per 1M input / output tokens. Checks run again when the customer writes again, and some orders need a claim review: we budget 1.3× the typical order.</a:t>
+            </a:r>
+          </a:p>
+        </p:txBody>
+      </p:sp>
+      <p:sp>
+        <p:nvSpPr>
+          <p:cNvPr id="136" name="Monthly heading"/>
+          <p:cNvSpPr txBox="1"/>
+          <p:nvPr/>
+        </p:nvSpPr>
+        <p:spPr>
+          <a:xfrm>
+            <a:off x="4599432" y="2212848"/>
+            <a:ext cx="4197096" cy="182880"/>
+          </a:xfrm>
+          <a:prstGeom prst="rect">
+            <a:avLst/>
+          </a:prstGeom>
+          <a:noFill/>
+        </p:spPr>
+        <p:txBody>
+          <a:bodyPr wrap="square" anchor="t" lIns="0" rIns="0" tIns="0" bIns="0">
+            <a:spAutoFit/>
+          </a:bodyPr>
+          <a:lstStyle/>
+          <a:p>
+            <a:pPr algn="l"/>
+            <a:r>
+              <a:rPr sz="950" b="0">
+                <a:solidFill>
+                  <a:srgbClr val="202124"/>
+                </a:solidFill>
+                <a:latin typeface="Google Sans Flex Medium"/>
+              </a:rPr>
+              <a:t>Monthly estimate</a:t>
+            </a:r>
+            <a:r>
+              <a:rPr sz="750" b="0">
+                <a:solidFill>
+                  <a:srgbClr val="5F6368"/>
+                </a:solidFill>
+                <a:latin typeface="Google Sans Flex"/>
+              </a:rPr>
+              <a:t>  ·  one seller</a:t>
+            </a:r>
+          </a:p>
+        </p:txBody>
+      </p:sp>
+      <p:graphicFrame>
+        <p:nvGraphicFramePr>
+          <p:cNvPr id="137" name="Monthly table"/>
+          <p:cNvGraphicFramePr>
+            <a:graphicFrameLocks noGrp="1"/>
+          </p:cNvGraphicFramePr>
+          <p:nvPr/>
+        </p:nvGraphicFramePr>
+        <p:xfrm>
+          <a:off x="4599432" y="2423160"/>
+          <a:ext cx="4014215" cy="1376172"/>
+        </p:xfrm>
+        <a:graphic>
+          <a:graphicData uri="http://schemas.openxmlformats.org/drawingml/2006/table">
+            <a:tbl>
+              <a:tblPr firstRow="1" bandRow="0"/>
+              <a:tblGrid>
+                <a:gridCol w="1874519"/>
+                <a:gridCol w="1005840"/>
+                <a:gridCol w="1133856"/>
+              </a:tblGrid>
+              <a:tr h="196596">
+                <a:tc>
+                  <a:txBody>
+                    <a:bodyPr wrap="square"/>
+                    <a:lstStyle/>
+                    <a:p>
+                      <a:pPr algn="l">
+                        <a:defRPr sz="750"/>
+                      </a:pPr>
+                      <a:r>
+                        <a:rPr sz="750" b="0">
+                          <a:solidFill>
+                            <a:srgbClr val="5F6368"/>
+                          </a:solidFill>
+                          <a:latin typeface="Google Sans Flex"/>
+                        </a:rPr>
+                        <a:t>Item</a:t>
+                      </a:r>
+                    </a:p>
+                  </a:txBody>
+                  <a:tcPr marL="45720" marR="45720" marT="9144" marB="9144" anchor="ctr">
+                    <a:solidFill>
+                      <a:srgbClr val="F1F3F4"/>
+                    </a:solidFill>
+                    <a:lnL w="0">
+                      <a:noFill/>
+                    </a:lnL>
+                    <a:lnR w="0">
+                      <a:noFill/>
+                    </a:lnR>
+                    <a:lnT w="0">
+                      <a:noFill/>
+                    </a:lnT>
+                    <a:lnB w="6350">
+                      <a:solidFill>
+                        <a:srgbClr val="DADCE0"/>
+                      </a:solidFill>
+                    </a:lnB>
+                  </a:tcPr>
+                </a:tc>
+                <a:tc>
+                  <a:txBody>
+                    <a:bodyPr wrap="square"/>
+                    <a:lstStyle/>
+                    <a:p>
+                      <a:pPr algn="r">
+                        <a:defRPr sz="750"/>
+                      </a:pPr>
+                      <a:r>
+                        <a:rPr sz="750" b="0">
+                          <a:solidFill>
+                            <a:srgbClr val="5F6368"/>
+                          </a:solidFill>
+                          <a:latin typeface="Google Sans Flex"/>
+                        </a:rPr>
+                        <a:t>300 orders</a:t>
+                      </a:r>
+                    </a:p>
+                  </a:txBody>
+                  <a:tcPr marL="45720" marR="45720" marT="9144" marB="9144" anchor="ctr">
+                    <a:solidFill>
+                      <a:srgbClr val="F1F3F4"/>
+                    </a:solidFill>
+                    <a:lnL w="0">
+                      <a:noFill/>
+                    </a:lnL>
+                    <a:lnR w="0">
+                      <a:noFill/>
+                    </a:lnR>
+                    <a:lnT w="0">
+                      <a:noFill/>
+                    </a:lnT>
+                    <a:lnB w="6350">
+                      <a:solidFill>
+                        <a:srgbClr val="DADCE0"/>
+                      </a:solidFill>
+                    </a:lnB>
+                  </a:tcPr>
+                </a:tc>
+                <a:tc>
+                  <a:txBody>
+                    <a:bodyPr wrap="square"/>
+                    <a:lstStyle/>
+                    <a:p>
+                      <a:pPr algn="r">
+                        <a:defRPr sz="750"/>
+                      </a:pPr>
+                      <a:r>
+                        <a:rPr sz="750" b="0">
+                          <a:solidFill>
+                            <a:srgbClr val="5F6368"/>
+                          </a:solidFill>
+                          <a:latin typeface="Google Sans Flex"/>
+                        </a:rPr>
+                        <a:t>3,000 orders</a:t>
+                      </a:r>
+                    </a:p>
+                  </a:txBody>
+                  <a:tcPr marL="45720" marR="45720" marT="9144" marB="9144" anchor="ctr">
+                    <a:solidFill>
+                      <a:srgbClr val="F1F3F4"/>
+                    </a:solidFill>
+                    <a:lnL w="0">
+                      <a:noFill/>
+                    </a:lnL>
+                    <a:lnR w="0">
+                      <a:noFill/>
+                    </a:lnR>
+                    <a:lnT w="0">
+                      <a:noFill/>
+                    </a:lnT>
+                    <a:lnB w="6350">
+                      <a:solidFill>
+                        <a:srgbClr val="DADCE0"/>
+                      </a:solidFill>
+                    </a:lnB>
+                  </a:tcPr>
+                </a:tc>
+              </a:tr>
+              <a:tr h="196596">
+                <a:tc>
+                  <a:txBody>
+                    <a:bodyPr wrap="square"/>
+                    <a:lstStyle/>
+                    <a:p>
+                      <a:pPr algn="l">
+                        <a:defRPr sz="800"/>
+                      </a:pPr>
+                      <a:r>
+                        <a:rPr sz="800" b="0">
+                          <a:solidFill>
+                            <a:srgbClr val="202124"/>
+                          </a:solidFill>
+                          <a:latin typeface="Google Sans Flex"/>
+                        </a:rPr>
+                        <a:t>Gemini (Vertex AI), 1.3× typical order</a:t>
+                      </a:r>
+                    </a:p>
+                  </a:txBody>
+                  <a:tcPr marL="45720" marR="45720" marT="9144" marB="9144" anchor="ctr">
+                    <a:solidFill>
+                      <a:srgbClr val="FFFFFF"/>
+                    </a:solidFill>
+                    <a:lnL w="0">
+                      <a:noFill/>
+                    </a:lnL>
+                    <a:lnR w="0">
+                      <a:noFill/>
+                    </a:lnR>
+                    <a:lnT w="0">
+                      <a:noFill/>
+                    </a:lnT>
+                    <a:lnB w="6350">
+                      <a:solidFill>
+                        <a:srgbClr val="DADCE0"/>
+                      </a:solidFill>
+                    </a:lnB>
+                  </a:tcPr>
+                </a:tc>
+                <a:tc>
+                  <a:txBody>
+                    <a:bodyPr wrap="square"/>
+                    <a:lstStyle/>
+                    <a:p>
+                      <a:pPr algn="r">
+                        <a:defRPr sz="800"/>
+                      </a:pPr>
+                      <a:r>
+                        <a:rPr sz="800" b="0">
+                          <a:solidFill>
+                            <a:srgbClr val="202124"/>
+                          </a:solidFill>
+                          <a:latin typeface="Google Sans Flex"/>
+                        </a:rPr>
+                        <a:t>$5.54</a:t>
+                      </a:r>
+                    </a:p>
+                  </a:txBody>
+                  <a:tcPr marL="45720" marR="45720" marT="9144" marB="9144" anchor="ctr">
+                    <a:solidFill>
+                      <a:srgbClr val="FFFFFF"/>
+                    </a:solidFill>
+                    <a:lnL w="0">
+                      <a:noFill/>
+                    </a:lnL>
+                    <a:lnR w="0">
+                      <a:noFill/>
+                    </a:lnR>
+                    <a:lnT w="0">
+                      <a:noFill/>
+                    </a:lnT>
+                    <a:lnB w="6350">
+                      <a:solidFill>
+                        <a:srgbClr val="DADCE0"/>
+                      </a:solidFill>
+                    </a:lnB>
+                  </a:tcPr>
+                </a:tc>
+                <a:tc>
+                  <a:txBody>
+                    <a:bodyPr wrap="square"/>
+                    <a:lstStyle/>
+                    <a:p>
+                      <a:pPr algn="r">
+                        <a:defRPr sz="800"/>
+                      </a:pPr>
+                      <a:r>
+                        <a:rPr sz="800" b="0">
+                          <a:solidFill>
+                            <a:srgbClr val="202124"/>
+                          </a:solidFill>
+                          <a:latin typeface="Google Sans Flex"/>
+                        </a:rPr>
+                        <a:t>$55.38</a:t>
+                      </a:r>
+                    </a:p>
+                  </a:txBody>
+                  <a:tcPr marL="45720" marR="45720" marT="9144" marB="9144" anchor="ctr">
+                    <a:solidFill>
+                      <a:srgbClr val="FFFFFF"/>
+                    </a:solidFill>
+                    <a:lnL w="0">
+                      <a:noFill/>
+                    </a:lnL>
+                    <a:lnR w="0">
+                      <a:noFill/>
+                    </a:lnR>
+                    <a:lnT w="0">
+                      <a:noFill/>
+                    </a:lnT>
+                    <a:lnB w="6350">
+                      <a:solidFill>
+                        <a:srgbClr val="DADCE0"/>
+                      </a:solidFill>
+                    </a:lnB>
+                  </a:tcPr>
+                </a:tc>
+              </a:tr>
+              <a:tr h="196596">
+                <a:tc>
+                  <a:txBody>
+                    <a:bodyPr wrap="square"/>
+                    <a:lstStyle/>
+                    <a:p>
+                      <a:pPr algn="l">
+                        <a:defRPr sz="800"/>
+                      </a:pPr>
+                      <a:r>
+                        <a:rPr sz="800" b="0">
+                          <a:solidFill>
+                            <a:srgbClr val="202124"/>
+                          </a:solidFill>
+                          <a:latin typeface="Google Sans Flex"/>
+                        </a:rPr>
+                        <a:t>Cloud Run, 1 warm instance</a:t>
+                      </a:r>
+                    </a:p>
+                  </a:txBody>
+                  <a:tcPr marL="45720" marR="45720" marT="9144" marB="9144" anchor="ctr">
+                    <a:solidFill>
+                      <a:srgbClr val="FFFFFF"/>
+                    </a:solidFill>
+                    <a:lnL w="0">
+                      <a:noFill/>
+                    </a:lnL>
+                    <a:lnR w="0">
+                      <a:noFill/>
+                    </a:lnR>
+                    <a:lnT w="0">
+                      <a:noFill/>
+                    </a:lnT>
+                    <a:lnB w="6350">
+                      <a:solidFill>
+                        <a:srgbClr val="DADCE0"/>
+                      </a:solidFill>
+                    </a:lnB>
+                  </a:tcPr>
+                </a:tc>
+                <a:tc>
+                  <a:txBody>
+                    <a:bodyPr wrap="square"/>
+                    <a:lstStyle/>
+                    <a:p>
+                      <a:pPr algn="r">
+                        <a:defRPr sz="800"/>
+                      </a:pPr>
+                      <a:r>
+                        <a:rPr sz="800" b="0">
+                          <a:solidFill>
+                            <a:srgbClr val="202124"/>
+                          </a:solidFill>
+                          <a:latin typeface="Google Sans Flex"/>
+                        </a:rPr>
+                        <a:t>$13.61</a:t>
+                      </a:r>
+                    </a:p>
+                  </a:txBody>
+                  <a:tcPr marL="45720" marR="45720" marT="9144" marB="9144" anchor="ctr">
+                    <a:solidFill>
+                      <a:srgbClr val="FFFFFF"/>
+                    </a:solidFill>
+                    <a:lnL w="0">
+                      <a:noFill/>
+                    </a:lnL>
+                    <a:lnR w="0">
+                      <a:noFill/>
+                    </a:lnR>
+                    <a:lnT w="0">
+                      <a:noFill/>
+                    </a:lnT>
+                    <a:lnB w="6350">
+                      <a:solidFill>
+                        <a:srgbClr val="DADCE0"/>
+                      </a:solidFill>
+                    </a:lnB>
+                  </a:tcPr>
+                </a:tc>
+                <a:tc>
+                  <a:txBody>
+                    <a:bodyPr wrap="square"/>
+                    <a:lstStyle/>
+                    <a:p>
+                      <a:pPr algn="r">
+                        <a:defRPr sz="800"/>
+                      </a:pPr>
+                      <a:r>
+                        <a:rPr sz="800" b="0">
+                          <a:solidFill>
+                            <a:srgbClr val="202124"/>
+                          </a:solidFill>
+                          <a:latin typeface="Google Sans Flex"/>
+                        </a:rPr>
+                        <a:t>$13.61</a:t>
+                      </a:r>
+                    </a:p>
+                  </a:txBody>
+                  <a:tcPr marL="45720" marR="45720" marT="9144" marB="9144" anchor="ctr">
+                    <a:solidFill>
+                      <a:srgbClr val="FFFFFF"/>
+                    </a:solidFill>
+                    <a:lnL w="0">
+                      <a:noFill/>
+                    </a:lnL>
+                    <a:lnR w="0">
+                      <a:noFill/>
+                    </a:lnR>
+                    <a:lnT w="0">
+                      <a:noFill/>
+                    </a:lnT>
+                    <a:lnB w="6350">
+                      <a:solidFill>
+                        <a:srgbClr val="DADCE0"/>
+                      </a:solidFill>
+                    </a:lnB>
+                  </a:tcPr>
+                </a:tc>
+              </a:tr>
+              <a:tr h="196596">
+                <a:tc>
+                  <a:txBody>
+                    <a:bodyPr wrap="square"/>
+                    <a:lstStyle/>
+                    <a:p>
+                      <a:pPr algn="l">
+                        <a:defRPr sz="800"/>
+                      </a:pPr>
+                      <a:r>
+                        <a:rPr sz="800" b="0">
+                          <a:solidFill>
+                            <a:srgbClr val="202124"/>
+                          </a:solidFill>
+                          <a:latin typeface="Google Sans Flex"/>
+                        </a:rPr>
+                        <a:t>Cloud Run busy time (estimate)</a:t>
+                      </a:r>
+                    </a:p>
+                  </a:txBody>
+                  <a:tcPr marL="45720" marR="45720" marT="9144" marB="9144" anchor="ctr">
+                    <a:solidFill>
+                      <a:srgbClr val="FFFFFF"/>
+                    </a:solidFill>
+                    <a:lnL w="0">
+                      <a:noFill/>
+                    </a:lnL>
+                    <a:lnR w="0">
+                      <a:noFill/>
+                    </a:lnR>
+                    <a:lnT w="0">
+                      <a:noFill/>
+                    </a:lnT>
+                    <a:lnB w="6350">
+                      <a:solidFill>
+                        <a:srgbClr val="DADCE0"/>
+                      </a:solidFill>
+                    </a:lnB>
+                  </a:tcPr>
+                </a:tc>
+                <a:tc>
+                  <a:txBody>
+                    <a:bodyPr wrap="square"/>
+                    <a:lstStyle/>
+                    <a:p>
+                      <a:pPr algn="r">
+                        <a:defRPr sz="800"/>
+                      </a:pPr>
+                      <a:r>
+                        <a:rPr sz="800" b="0">
+                          <a:solidFill>
+                            <a:srgbClr val="202124"/>
+                          </a:solidFill>
+                          <a:latin typeface="Google Sans Flex"/>
+                        </a:rPr>
+                        <a:t>free tier</a:t>
+                      </a:r>
+                    </a:p>
+                  </a:txBody>
+                  <a:tcPr marL="45720" marR="45720" marT="9144" marB="9144" anchor="ctr">
+                    <a:solidFill>
+                      <a:srgbClr val="FFFFFF"/>
+                    </a:solidFill>
+                    <a:lnL w="0">
+                      <a:noFill/>
+                    </a:lnL>
+                    <a:lnR w="0">
+                      <a:noFill/>
+                    </a:lnR>
+                    <a:lnT w="0">
+                      <a:noFill/>
+                    </a:lnT>
+                    <a:lnB w="6350">
+                      <a:solidFill>
+                        <a:srgbClr val="DADCE0"/>
+                      </a:solidFill>
+                    </a:lnB>
+                  </a:tcPr>
+                </a:tc>
+                <a:tc>
+                  <a:txBody>
+                    <a:bodyPr wrap="square"/>
+                    <a:lstStyle/>
+                    <a:p>
+                      <a:pPr algn="r">
+                        <a:defRPr sz="800"/>
+                      </a:pPr>
+                      <a:r>
+                        <a:rPr sz="800" b="0">
+                          <a:solidFill>
+                            <a:srgbClr val="202124"/>
+                          </a:solidFill>
+                          <a:latin typeface="Google Sans Flex"/>
+                        </a:rPr>
+                        <a:t>≈ $1</a:t>
+                      </a:r>
+                    </a:p>
+                  </a:txBody>
+                  <a:tcPr marL="45720" marR="45720" marT="9144" marB="9144" anchor="ctr">
+                    <a:solidFill>
+                      <a:srgbClr val="FFFFFF"/>
+                    </a:solidFill>
+                    <a:lnL w="0">
+                      <a:noFill/>
+                    </a:lnL>
+                    <a:lnR w="0">
+                      <a:noFill/>
+                    </a:lnR>
+                    <a:lnT w="0">
+                      <a:noFill/>
+                    </a:lnT>
+                    <a:lnB w="6350">
+                      <a:solidFill>
+                        <a:srgbClr val="DADCE0"/>
+                      </a:solidFill>
+                    </a:lnB>
+                  </a:tcPr>
+                </a:tc>
+              </a:tr>
+              <a:tr h="196596">
+                <a:tc>
+                  <a:txBody>
+                    <a:bodyPr wrap="square"/>
+                    <a:lstStyle/>
+                    <a:p>
+                      <a:pPr algn="l">
+                        <a:defRPr sz="800"/>
+                      </a:pPr>
+                      <a:r>
+                        <a:rPr sz="800" b="0">
+                          <a:solidFill>
+                            <a:srgbClr val="202124"/>
+                          </a:solidFill>
+                          <a:latin typeface="Google Sans Flex"/>
+                        </a:rPr>
+                        <a:t>Firestore, Storage, Hosting</a:t>
+                      </a:r>
+                    </a:p>
+                  </a:txBody>
+                  <a:tcPr marL="45720" marR="45720" marT="9144" marB="9144" anchor="ctr">
+                    <a:solidFill>
+                      <a:srgbClr val="FFFFFF"/>
+                    </a:solidFill>
+                    <a:lnL w="0">
+                      <a:noFill/>
+                    </a:lnL>
+                    <a:lnR w="0">
+                      <a:noFill/>
+                    </a:lnR>
+                    <a:lnT w="0">
+                      <a:noFill/>
+                    </a:lnT>
+                    <a:lnB w="6350">
+                      <a:solidFill>
+                        <a:srgbClr val="DADCE0"/>
+                      </a:solidFill>
+                    </a:lnB>
+                  </a:tcPr>
+                </a:tc>
+                <a:tc>
+                  <a:txBody>
+                    <a:bodyPr wrap="square"/>
+                    <a:lstStyle/>
+                    <a:p>
+                      <a:pPr algn="r">
+                        <a:defRPr sz="800"/>
+                      </a:pPr>
+                      <a:r>
+                        <a:rPr sz="800" b="0">
+                          <a:solidFill>
+                            <a:srgbClr val="202124"/>
+                          </a:solidFill>
+                          <a:latin typeface="Google Sans Flex"/>
+                        </a:rPr>
+                        <a:t>free tier</a:t>
+                      </a:r>
+                    </a:p>
+                  </a:txBody>
+                  <a:tcPr marL="45720" marR="45720" marT="9144" marB="9144" anchor="ctr">
+                    <a:solidFill>
+                      <a:srgbClr val="FFFFFF"/>
+                    </a:solidFill>
+                    <a:lnL w="0">
+                      <a:noFill/>
+                    </a:lnL>
+                    <a:lnR w="0">
+                      <a:noFill/>
+                    </a:lnR>
+                    <a:lnT w="0">
+                      <a:noFill/>
+                    </a:lnT>
+                    <a:lnB w="6350">
+                      <a:solidFill>
+                        <a:srgbClr val="DADCE0"/>
+                      </a:solidFill>
+                    </a:lnB>
+                  </a:tcPr>
+                </a:tc>
+                <a:tc>
+                  <a:txBody>
+                    <a:bodyPr wrap="square"/>
+                    <a:lstStyle/>
+                    <a:p>
+                      <a:pPr algn="r">
+                        <a:defRPr sz="800"/>
+                      </a:pPr>
+                      <a:r>
+                        <a:rPr sz="800" b="0">
+                          <a:solidFill>
+                            <a:srgbClr val="202124"/>
+                          </a:solidFill>
+                          <a:latin typeface="Google Sans Flex"/>
+                        </a:rPr>
+                        <a:t>free tier</a:t>
+                      </a:r>
+                    </a:p>
+                  </a:txBody>
+                  <a:tcPr marL="45720" marR="45720" marT="9144" marB="9144" anchor="ctr">
+                    <a:solidFill>
+                      <a:srgbClr val="FFFFFF"/>
+                    </a:solidFill>
+                    <a:lnL w="0">
+                      <a:noFill/>
+                    </a:lnL>
+                    <a:lnR w="0">
+                      <a:noFill/>
+                    </a:lnR>
+                    <a:lnT w="0">
+                      <a:noFill/>
+                    </a:lnT>
+                    <a:lnB w="6350">
+                      <a:solidFill>
+                        <a:srgbClr val="DADCE0"/>
+                      </a:solidFill>
+                    </a:lnB>
+                  </a:tcPr>
+                </a:tc>
+              </a:tr>
+              <a:tr h="196596">
+                <a:tc>
+                  <a:txBody>
+                    <a:bodyPr wrap="square"/>
+                    <a:lstStyle/>
+                    <a:p>
+                      <a:pPr algn="l">
+                        <a:defRPr sz="800"/>
+                      </a:pPr>
+                      <a:r>
+                        <a:rPr sz="800" b="0">
+                          <a:solidFill>
+                            <a:srgbClr val="202124"/>
+                          </a:solidFill>
+                          <a:latin typeface="Google Sans Flex"/>
+                        </a:rPr>
+                        <a:t>Secret Manager (10 secrets)</a:t>
+                      </a:r>
+                    </a:p>
+                  </a:txBody>
+                  <a:tcPr marL="45720" marR="45720" marT="9144" marB="9144" anchor="ctr">
+                    <a:solidFill>
+                      <a:srgbClr val="FFFFFF"/>
+                    </a:solidFill>
+                    <a:lnL w="0">
+                      <a:noFill/>
+                    </a:lnL>
+                    <a:lnR w="0">
+                      <a:noFill/>
+                    </a:lnR>
+                    <a:lnT w="0">
+                      <a:noFill/>
+                    </a:lnT>
+                    <a:lnB w="6350">
+                      <a:solidFill>
+                        <a:srgbClr val="DADCE0"/>
+                      </a:solidFill>
+                    </a:lnB>
+                  </a:tcPr>
+                </a:tc>
+                <a:tc>
+                  <a:txBody>
+                    <a:bodyPr wrap="square"/>
+                    <a:lstStyle/>
+                    <a:p>
+                      <a:pPr algn="r">
+                        <a:defRPr sz="800"/>
+                      </a:pPr>
+                      <a:r>
+                        <a:rPr sz="800" b="0">
+                          <a:solidFill>
+                            <a:srgbClr val="202124"/>
+                          </a:solidFill>
+                          <a:latin typeface="Google Sans Flex"/>
+                        </a:rPr>
+                        <a:t>$0.24</a:t>
+                      </a:r>
+                    </a:p>
+                  </a:txBody>
+                  <a:tcPr marL="45720" marR="45720" marT="9144" marB="9144" anchor="ctr">
+                    <a:solidFill>
+                      <a:srgbClr val="FFFFFF"/>
+                    </a:solidFill>
+                    <a:lnL w="0">
+                      <a:noFill/>
+                    </a:lnL>
+                    <a:lnR w="0">
+                      <a:noFill/>
+                    </a:lnR>
+                    <a:lnT w="0">
+                      <a:noFill/>
+                    </a:lnT>
+                    <a:lnB w="6350">
+                      <a:solidFill>
+                        <a:srgbClr val="DADCE0"/>
+                      </a:solidFill>
+                    </a:lnB>
+                  </a:tcPr>
+                </a:tc>
+                <a:tc>
+                  <a:txBody>
+                    <a:bodyPr wrap="square"/>
+                    <a:lstStyle/>
+                    <a:p>
+                      <a:pPr algn="r">
+                        <a:defRPr sz="800"/>
+                      </a:pPr>
+                      <a:r>
+                        <a:rPr sz="800" b="0">
+                          <a:solidFill>
+                            <a:srgbClr val="202124"/>
+                          </a:solidFill>
+                          <a:latin typeface="Google Sans Flex"/>
+                        </a:rPr>
+                        <a:t>$0.24</a:t>
+                      </a:r>
+                    </a:p>
+                  </a:txBody>
+                  <a:tcPr marL="45720" marR="45720" marT="9144" marB="9144" anchor="ctr">
+                    <a:solidFill>
+                      <a:srgbClr val="FFFFFF"/>
+                    </a:solidFill>
+                    <a:lnL w="0">
+                      <a:noFill/>
+                    </a:lnL>
+                    <a:lnR w="0">
+                      <a:noFill/>
+                    </a:lnR>
+                    <a:lnT w="0">
+                      <a:noFill/>
+                    </a:lnT>
+                    <a:lnB w="6350">
+                      <a:solidFill>
+                        <a:srgbClr val="DADCE0"/>
+                      </a:solidFill>
+                    </a:lnB>
+                  </a:tcPr>
+                </a:tc>
+              </a:tr>
+              <a:tr h="196596">
+                <a:tc>
+                  <a:txBody>
+                    <a:bodyPr wrap="square"/>
+                    <a:lstStyle/>
+                    <a:p>
+                      <a:pPr algn="l">
+                        <a:defRPr sz="800"/>
+                      </a:pPr>
+                      <a:r>
+                        <a:rPr sz="800" b="0">
+                          <a:solidFill>
+                            <a:srgbClr val="202124"/>
+                          </a:solidFill>
+                          <a:latin typeface="Google Sans Flex"/>
+                        </a:rPr>
+                        <a:t>Total</a:t>
+                      </a:r>
+                    </a:p>
+                  </a:txBody>
+                  <a:tcPr marL="45720" marR="45720" marT="9144" marB="9144" anchor="ctr">
+                    <a:solidFill>
+                      <a:srgbClr val="FFFFFF"/>
+                    </a:solidFill>
+                    <a:lnL w="0">
+                      <a:noFill/>
+                    </a:lnL>
+                    <a:lnR w="0">
+                      <a:noFill/>
+                    </a:lnR>
+                    <a:lnT w="0">
+                      <a:noFill/>
+                    </a:lnT>
+                    <a:lnB w="6350">
+                      <a:solidFill>
+                        <a:srgbClr val="DADCE0"/>
+                      </a:solidFill>
+                    </a:lnB>
+                  </a:tcPr>
+                </a:tc>
+                <a:tc>
+                  <a:txBody>
+                    <a:bodyPr wrap="square"/>
+                    <a:lstStyle/>
+                    <a:p>
+                      <a:pPr algn="r">
+                        <a:defRPr sz="800"/>
+                      </a:pPr>
+                      <a:r>
+                        <a:rPr sz="800" b="0">
+                          <a:solidFill>
+                            <a:srgbClr val="202124"/>
+                          </a:solidFill>
+                          <a:latin typeface="Google Sans Flex"/>
+                        </a:rPr>
+                        <a:t>$19.39</a:t>
+                      </a:r>
+                    </a:p>
+                  </a:txBody>
+                  <a:tcPr marL="45720" marR="45720" marT="9144" marB="9144" anchor="ctr">
+                    <a:solidFill>
+                      <a:srgbClr val="FFFFFF"/>
+                    </a:solidFill>
+                    <a:lnL w="0">
+                      <a:noFill/>
+                    </a:lnL>
+                    <a:lnR w="0">
+                      <a:noFill/>
+                    </a:lnR>
+                    <a:lnT w="0">
+                      <a:noFill/>
+                    </a:lnT>
+                    <a:lnB w="6350">
+                      <a:solidFill>
+                        <a:srgbClr val="DADCE0"/>
+                      </a:solidFill>
+                    </a:lnB>
+                  </a:tcPr>
+                </a:tc>
+                <a:tc>
+                  <a:txBody>
+                    <a:bodyPr wrap="square"/>
+                    <a:lstStyle/>
+                    <a:p>
+                      <a:pPr algn="r">
+                        <a:defRPr sz="800"/>
+                      </a:pPr>
+                      <a:r>
+                        <a:rPr sz="800" b="0">
+                          <a:solidFill>
+                            <a:srgbClr val="202124"/>
+                          </a:solidFill>
+                          <a:latin typeface="Google Sans Flex"/>
+                        </a:rPr>
+                        <a:t>$69.99</a:t>
+                      </a:r>
+                    </a:p>
+                  </a:txBody>
+                  <a:tcPr marL="45720" marR="45720" marT="9144" marB="9144" anchor="ctr">
+                    <a:solidFill>
+                      <a:srgbClr val="FFFFFF"/>
+                    </a:solidFill>
+                    <a:lnL w="0">
+                      <a:noFill/>
+                    </a:lnL>
+                    <a:lnR w="0">
+                      <a:noFill/>
+                    </a:lnR>
+                    <a:lnT w="0">
+                      <a:noFill/>
+                    </a:lnT>
+                    <a:lnB w="6350">
+                      <a:solidFill>
+                        <a:srgbClr val="DADCE0"/>
+                      </a:solidFill>
+                    </a:lnB>
+                  </a:tcPr>
+                </a:tc>
+              </a:tr>
+            </a:tbl>
+          </a:graphicData>
+        </a:graphic>
+      </p:graphicFrame>
+      <p:sp>
+        <p:nvSpPr>
+          <p:cNvPr id="138" name="Monthly note"/>
+          <p:cNvSpPr txBox="1"/>
+          <p:nvPr/>
+        </p:nvSpPr>
+        <p:spPr>
+          <a:xfrm>
+            <a:off x="4599432" y="3886200"/>
+            <a:ext cx="4197096" cy="292608"/>
+          </a:xfrm>
+          <a:prstGeom prst="rect">
+            <a:avLst/>
+          </a:prstGeom>
+          <a:noFill/>
+        </p:spPr>
+        <p:txBody>
+          <a:bodyPr wrap="square" anchor="t" lIns="0" rIns="0" tIns="0" bIns="0">
+            <a:spAutoFit/>
+          </a:bodyPr>
+          <a:lstStyle/>
+          <a:p>
+            <a:pPr algn="l"/>
+            <a:r>
+              <a:rPr sz="700" b="0">
+                <a:solidFill>
+                  <a:srgbClr val="5F6368"/>
+                </a:solidFill>
+                <a:latin typeface="Google Sans Flex"/>
+              </a:rPr>
+              <a:t>Free tiers: Cloud Run (Tier 2) 128,571 vCPU-s and 2M requests a month; Firestore 50,000 reads and 20,000 writes a day, 1 GiB. Busy time assumes about 50 instance-seconds per order.</a:t>
+            </a:r>
+          </a:p>
+        </p:txBody>
+      </p:sp>
+      <p:sp>
+        <p:nvSpPr>
+          <p:cNvPr id="139" name="Not included"/>
+          <p:cNvSpPr/>
+          <p:nvPr/>
+        </p:nvSpPr>
+        <p:spPr>
+          <a:xfrm>
+            <a:off x="347472" y="4206240"/>
+            <a:ext cx="8449056" cy="713232"/>
+          </a:xfrm>
+          <a:prstGeom prst="roundRect">
+            <a:avLst>
+              <a:gd name="adj" fmla="val 8000"/>
+            </a:avLst>
+          </a:prstGeom>
+          <a:solidFill>
+            <a:srgbClr val="F1F3F4"/>
+          </a:solidFill>
+          <a:ln>
+            <a:noFill/>
+          </a:ln>
+        </p:spPr>
+        <p:txBody>
+          <a:bodyPr rtlCol="0" anchor="t" wrap="square" tIns="91440" bIns="91440"/>
+          <a:lstStyle/>
+          <a:p>
+            <a:pPr algn="l"/>
+            <a:r>
+              <a:rPr sz="750" b="1">
+                <a:solidFill>
+                  <a:srgbClr val="202124"/>
+                </a:solidFill>
+                <a:latin typeface="Google Sans Flex"/>
+              </a:rPr>
+              <a:t>Paid by the seller or customer, not by Suri: </a:t>
+            </a:r>
+            <a:r>
+              <a:rPr sz="750" b="0">
+                <a:solidFill>
+                  <a:srgbClr val="202124"/>
+                </a:solidFill>
+                <a:latin typeface="Google Sans Flex"/>
+              </a:rPr>
+              <a:t>PayMongo's transaction fees, Lalamove delivery fees and GCash transfers. Messenger and the Graph API are free.</a:t>
+            </a:r>
+          </a:p>
+          <a:p>
+            <a:pPr algn="l">
+              <a:spcBef>
+                <a:spcPts val="300"/>
+              </a:spcBef>
+            </a:pPr>
+            <a:r>
+              <a:rPr sz="750" b="1">
+                <a:solidFill>
+                  <a:srgbClr val="202124"/>
+                </a:solidFill>
+                <a:latin typeface="Google Sans Flex"/>
+              </a:rPr>
+              <a:t>Ways to cut it: </a:t>
+            </a:r>
+            <a:r>
+              <a:rPr sz="750" b="0">
+                <a:solidFill>
+                  <a:srgbClr val="202124"/>
+                </a:solidFill>
+                <a:latin typeface="Google Sans Flex"/>
+              </a:rPr>
+              <a:t>scale to zero outside selling hours ($13.6 less a month, with a cold start); Flex or batch pricing for non-urgent checks halves the Gemini price; cached checks already avoid repeat calls when a chat is opened again.</a:t>
+            </a:r>
+          </a:p>
+        </p:txBody>
+      </p:sp>
     </p:spTree>
   </p:cSld>
   <p:clrMapOvr>
@@ -7721,6 +10076,3000 @@
               <a:cs typeface="Google Sans Flex Medium"/>
               <a:sym typeface="Google Sans Flex Medium"/>
             </a:endParaRPr>
+          </a:p>
+        </p:txBody>
+      </p:sp>
+      <p:sp>
+        <p:nvSpPr>
+          <p:cNvPr id="144" name="Benchmark scope"/>
+          <p:cNvSpPr txBox="1"/>
+          <p:nvPr/>
+        </p:nvSpPr>
+        <p:spPr>
+          <a:xfrm>
+            <a:off x="347472" y="1033271"/>
+            <a:ext cx="8449056" cy="182880"/>
+          </a:xfrm>
+          <a:prstGeom prst="rect">
+            <a:avLst/>
+          </a:prstGeom>
+          <a:noFill/>
+        </p:spPr>
+        <p:txBody>
+          <a:bodyPr wrap="square" anchor="t" lIns="0" rIns="0" tIns="0" bIns="0">
+            <a:spAutoFit/>
+          </a:bodyPr>
+          <a:lstStyle/>
+          <a:p>
+            <a:pPr algn="l"/>
+            <a:r>
+              <a:rPr sz="750" b="0">
+                <a:solidFill>
+                  <a:srgbClr val="5F6368"/>
+                </a:solidFill>
+                <a:latin typeface="Google Sans Flex"/>
+              </a:rPr>
+              <a:t>Deployed prototype (Cloud Run + Firebase Hosting) and make eval: 84 synthetic cases × 3 runs, scored in code. Gemini on Vertex AI (gemini-3.8-flash). Eval run 2026-10-18 12:55 UTC.</a:t>
+            </a:r>
+          </a:p>
+        </p:txBody>
+      </p:sp>
+      <p:sp>
+        <p:nvSpPr>
+          <p:cNvPr id="145" name="KPI 1"/>
+          <p:cNvSpPr/>
+          <p:nvPr/>
+        </p:nvSpPr>
+        <p:spPr>
+          <a:xfrm>
+            <a:off x="347472" y="1261872"/>
+            <a:ext cx="2009394" cy="713232"/>
+          </a:xfrm>
+          <a:prstGeom prst="roundRect">
+            <a:avLst>
+              <a:gd name="adj" fmla="val 8000"/>
+            </a:avLst>
+          </a:prstGeom>
+          <a:solidFill>
+            <a:srgbClr val="F1F3F4"/>
+          </a:solidFill>
+          <a:ln>
+            <a:noFill/>
+          </a:ln>
+        </p:spPr>
+        <p:txBody>
+          <a:bodyPr rtlCol="0" anchor="t" wrap="square" lIns="82296" rIns="82296" tIns="82296" bIns="82296"/>
+          <a:lstStyle/>
+          <a:p>
+            <a:pPr algn="l"/>
+            <a:r>
+              <a:rPr sz="1700" b="0">
+                <a:solidFill>
+                  <a:srgbClr val="188038"/>
+                </a:solidFill>
+                <a:latin typeface="Google Sans Flex Medium"/>
+              </a:rPr>
+              <a:t>57/57</a:t>
+            </a:r>
+          </a:p>
+          <a:p>
+            <a:pPr algn="l"/>
+            <a:r>
+              <a:rPr sz="850" b="0">
+                <a:solidFill>
+                  <a:srgbClr val="202124"/>
+                </a:solidFill>
+                <a:latin typeface="Google Sans Flex Medium"/>
+              </a:rPr>
+              <a:t>risky messages caught</a:t>
+            </a:r>
+          </a:p>
+          <a:p>
+            <a:pPr algn="l"/>
+            <a:r>
+              <a:rPr sz="700" b="0">
+                <a:solidFill>
+                  <a:srgbClr val="5F6368"/>
+                </a:solidFill>
+                <a:latin typeface="Google Sans Flex"/>
+              </a:rPr>
+              <a:t>checks before shipping; 0 false alarms in 129 runs</a:t>
+            </a:r>
+          </a:p>
+        </p:txBody>
+      </p:sp>
+      <p:sp>
+        <p:nvSpPr>
+          <p:cNvPr id="146" name="KPI 2"/>
+          <p:cNvSpPr/>
+          <p:nvPr/>
+        </p:nvSpPr>
+        <p:spPr>
+          <a:xfrm>
+            <a:off x="2494026" y="1261872"/>
+            <a:ext cx="2009394" cy="713232"/>
+          </a:xfrm>
+          <a:prstGeom prst="roundRect">
+            <a:avLst>
+              <a:gd name="adj" fmla="val 8000"/>
+            </a:avLst>
+          </a:prstGeom>
+          <a:solidFill>
+            <a:srgbClr val="F1F3F4"/>
+          </a:solidFill>
+          <a:ln>
+            <a:noFill/>
+          </a:ln>
+        </p:spPr>
+        <p:txBody>
+          <a:bodyPr rtlCol="0" anchor="t" wrap="square" lIns="82296" rIns="82296" tIns="82296" bIns="82296"/>
+          <a:lstStyle/>
+          <a:p>
+            <a:pPr algn="l"/>
+            <a:r>
+              <a:rPr sz="1700" b="0">
+                <a:solidFill>
+                  <a:srgbClr val="188038"/>
+                </a:solidFill>
+                <a:latin typeface="Google Sans Flex Medium"/>
+              </a:rPr>
+              <a:t>0</a:t>
+            </a:r>
+          </a:p>
+          <a:p>
+            <a:pPr algn="l"/>
+            <a:r>
+              <a:rPr sz="850" b="0">
+                <a:solidFill>
+                  <a:srgbClr val="202124"/>
+                </a:solidFill>
+                <a:latin typeface="Google Sans Flex Medium"/>
+              </a:rPr>
+              <a:t>unsafe outcomes</a:t>
+            </a:r>
+          </a:p>
+          <a:p>
+            <a:pPr algn="l"/>
+            <a:r>
+              <a:rPr sz="700" b="0">
+                <a:solidFill>
+                  <a:srgbClr val="5F6368"/>
+                </a:solidFill>
+                <a:latin typeface="Google Sans Flex"/>
+              </a:rPr>
+              <a:t>customer value in an order, false packing match, planted receipt text passed</a:t>
+            </a:r>
+          </a:p>
+        </p:txBody>
+      </p:sp>
+      <p:sp>
+        <p:nvSpPr>
+          <p:cNvPr id="147" name="KPI 3"/>
+          <p:cNvSpPr/>
+          <p:nvPr/>
+        </p:nvSpPr>
+        <p:spPr>
+          <a:xfrm>
+            <a:off x="4640580" y="1261872"/>
+            <a:ext cx="2009394" cy="713232"/>
+          </a:xfrm>
+          <a:prstGeom prst="roundRect">
+            <a:avLst>
+              <a:gd name="adj" fmla="val 8000"/>
+            </a:avLst>
+          </a:prstGeom>
+          <a:solidFill>
+            <a:srgbClr val="F1F3F4"/>
+          </a:solidFill>
+          <a:ln>
+            <a:noFill/>
+          </a:ln>
+        </p:spPr>
+        <p:txBody>
+          <a:bodyPr rtlCol="0" anchor="t" wrap="square" lIns="82296" rIns="82296" tIns="82296" bIns="82296"/>
+          <a:lstStyle/>
+          <a:p>
+            <a:pPr algn="l"/>
+            <a:r>
+              <a:rPr sz="1700" b="0">
+                <a:solidFill>
+                  <a:srgbClr val="1A73E8"/>
+                </a:solidFill>
+                <a:latin typeface="Google Sans Flex Medium"/>
+              </a:rPr>
+              <a:t>3.1 s</a:t>
+            </a:r>
+          </a:p>
+          <a:p>
+            <a:pPr algn="l"/>
+            <a:r>
+              <a:rPr sz="850" b="0">
+                <a:solidFill>
+                  <a:srgbClr val="202124"/>
+                </a:solidFill>
+                <a:latin typeface="Google Sans Flex Medium"/>
+              </a:rPr>
+              <a:t>checks, end to end</a:t>
+            </a:r>
+          </a:p>
+          <a:p>
+            <a:pPr algn="l"/>
+            <a:r>
+              <a:rPr sz="700" b="0">
+                <a:solidFill>
+                  <a:srgbClr val="5F6368"/>
+                </a:solidFill>
+                <a:latin typeface="Google Sans Flex"/>
+              </a:rPr>
+              <a:t>median, live app; draft order 5.8 s</a:t>
+            </a:r>
+          </a:p>
+        </p:txBody>
+      </p:sp>
+      <p:sp>
+        <p:nvSpPr>
+          <p:cNvPr id="148" name="KPI 4"/>
+          <p:cNvSpPr/>
+          <p:nvPr/>
+        </p:nvSpPr>
+        <p:spPr>
+          <a:xfrm>
+            <a:off x="6787134" y="1261872"/>
+            <a:ext cx="2009394" cy="713232"/>
+          </a:xfrm>
+          <a:prstGeom prst="roundRect">
+            <a:avLst>
+              <a:gd name="adj" fmla="val 8000"/>
+            </a:avLst>
+          </a:prstGeom>
+          <a:solidFill>
+            <a:srgbClr val="F1F3F4"/>
+          </a:solidFill>
+          <a:ln>
+            <a:noFill/>
+          </a:ln>
+        </p:spPr>
+        <p:txBody>
+          <a:bodyPr rtlCol="0" anchor="t" wrap="square" lIns="82296" rIns="82296" tIns="82296" bIns="82296"/>
+          <a:lstStyle/>
+          <a:p>
+            <a:pPr algn="l"/>
+            <a:r>
+              <a:rPr sz="1700" b="0">
+                <a:solidFill>
+                  <a:srgbClr val="1A73E8"/>
+                </a:solidFill>
+                <a:latin typeface="Google Sans Flex Medium"/>
+              </a:rPr>
+              <a:t>$0.0057</a:t>
+            </a:r>
+          </a:p>
+          <a:p>
+            <a:pPr algn="l"/>
+            <a:r>
+              <a:rPr sz="850" b="0">
+                <a:solidFill>
+                  <a:srgbClr val="202124"/>
+                </a:solidFill>
+                <a:latin typeface="Google Sans Flex Medium"/>
+              </a:rPr>
+              <a:t>Gemini cost per action</a:t>
+            </a:r>
+          </a:p>
+          <a:p>
+            <a:pPr algn="l"/>
+            <a:r>
+              <a:rPr sz="700" b="0">
+                <a:solidFill>
+                  <a:srgbClr val="5F6368"/>
+                </a:solidFill>
+                <a:latin typeface="Google Sans Flex"/>
+              </a:rPr>
+              <a:t>median, draft + checks; claim review $0.0123</a:t>
+            </a:r>
+          </a:p>
+        </p:txBody>
+      </p:sp>
+      <p:sp>
+        <p:nvSpPr>
+          <p:cNvPr id="149" name="Accuracy heading"/>
+          <p:cNvSpPr txBox="1"/>
+          <p:nvPr/>
+        </p:nvSpPr>
+        <p:spPr>
+          <a:xfrm>
+            <a:off x="347472" y="2075688"/>
+            <a:ext cx="3886200" cy="182880"/>
+          </a:xfrm>
+          <a:prstGeom prst="rect">
+            <a:avLst/>
+          </a:prstGeom>
+          <a:noFill/>
+        </p:spPr>
+        <p:txBody>
+          <a:bodyPr wrap="square" anchor="t" lIns="0" rIns="0" tIns="0" bIns="0">
+            <a:spAutoFit/>
+          </a:bodyPr>
+          <a:lstStyle/>
+          <a:p>
+            <a:pPr algn="l"/>
+            <a:r>
+              <a:rPr sz="950" b="0">
+                <a:solidFill>
+                  <a:srgbClr val="202124"/>
+                </a:solidFill>
+                <a:latin typeface="Google Sans Flex Medium"/>
+              </a:rPr>
+              <a:t>AI accuracy</a:t>
+            </a:r>
+            <a:r>
+              <a:rPr sz="750" b="0">
+                <a:solidFill>
+                  <a:srgbClr val="5F6368"/>
+                </a:solidFill>
+                <a:latin typeface="Google Sans Flex"/>
+              </a:rPr>
+              <a:t>  ·  gemini-3.8-flash, 3 runs per case</a:t>
+            </a:r>
+          </a:p>
+        </p:txBody>
+      </p:sp>
+      <p:graphicFrame>
+        <p:nvGraphicFramePr>
+          <p:cNvPr id="150" name="Accuracy table"/>
+          <p:cNvGraphicFramePr>
+            <a:graphicFrameLocks noGrp="1"/>
+          </p:cNvGraphicFramePr>
+          <p:nvPr/>
+        </p:nvGraphicFramePr>
+        <p:xfrm>
+          <a:off x="347472" y="2286000"/>
+          <a:ext cx="3886200" cy="1312164"/>
+        </p:xfrm>
+        <a:graphic>
+          <a:graphicData uri="http://schemas.openxmlformats.org/drawingml/2006/table">
+            <a:tbl>
+              <a:tblPr firstRow="1" bandRow="0"/>
+              <a:tblGrid>
+                <a:gridCol w="1280160"/>
+                <a:gridCol w="1645920"/>
+                <a:gridCol w="960120"/>
+              </a:tblGrid>
+              <a:tr h="187452">
+                <a:tc>
+                  <a:txBody>
+                    <a:bodyPr wrap="square"/>
+                    <a:lstStyle/>
+                    <a:p>
+                      <a:pPr algn="l">
+                        <a:defRPr sz="750"/>
+                      </a:pPr>
+                      <a:r>
+                        <a:rPr sz="750" b="0">
+                          <a:solidFill>
+                            <a:srgbClr val="5F6368"/>
+                          </a:solidFill>
+                          <a:latin typeface="Google Sans Flex"/>
+                        </a:rPr>
+                        <a:t>Task (cases)</a:t>
+                      </a:r>
+                    </a:p>
+                  </a:txBody>
+                  <a:tcPr marL="45720" marR="45720" marT="9144" marB="9144" anchor="ctr">
+                    <a:solidFill>
+                      <a:srgbClr val="F1F3F4"/>
+                    </a:solidFill>
+                    <a:lnL w="0">
+                      <a:noFill/>
+                    </a:lnL>
+                    <a:lnR w="0">
+                      <a:noFill/>
+                    </a:lnR>
+                    <a:lnT w="0">
+                      <a:noFill/>
+                    </a:lnT>
+                    <a:lnB w="6350">
+                      <a:solidFill>
+                        <a:srgbClr val="DADCE0"/>
+                      </a:solidFill>
+                    </a:lnB>
+                  </a:tcPr>
+                </a:tc>
+                <a:tc>
+                  <a:txBody>
+                    <a:bodyPr wrap="square"/>
+                    <a:lstStyle/>
+                    <a:p>
+                      <a:pPr algn="l">
+                        <a:defRPr sz="750"/>
+                      </a:pPr>
+                      <a:r>
+                        <a:rPr sz="750" b="0">
+                          <a:solidFill>
+                            <a:srgbClr val="5F6368"/>
+                          </a:solidFill>
+                          <a:latin typeface="Google Sans Flex"/>
+                        </a:rPr>
+                        <a:t>Measure</a:t>
+                      </a:r>
+                    </a:p>
+                  </a:txBody>
+                  <a:tcPr marL="45720" marR="45720" marT="9144" marB="9144" anchor="ctr">
+                    <a:solidFill>
+                      <a:srgbClr val="F1F3F4"/>
+                    </a:solidFill>
+                    <a:lnL w="0">
+                      <a:noFill/>
+                    </a:lnL>
+                    <a:lnR w="0">
+                      <a:noFill/>
+                    </a:lnR>
+                    <a:lnT w="0">
+                      <a:noFill/>
+                    </a:lnT>
+                    <a:lnB w="6350">
+                      <a:solidFill>
+                        <a:srgbClr val="DADCE0"/>
+                      </a:solidFill>
+                    </a:lnB>
+                  </a:tcPr>
+                </a:tc>
+                <a:tc>
+                  <a:txBody>
+                    <a:bodyPr wrap="square"/>
+                    <a:lstStyle/>
+                    <a:p>
+                      <a:pPr algn="r">
+                        <a:defRPr sz="750"/>
+                      </a:pPr>
+                      <a:r>
+                        <a:rPr sz="750" b="0">
+                          <a:solidFill>
+                            <a:srgbClr val="5F6368"/>
+                          </a:solidFill>
+                          <a:latin typeface="Google Sans Flex"/>
+                        </a:rPr>
+                        <a:t>Result</a:t>
+                      </a:r>
+                    </a:p>
+                  </a:txBody>
+                  <a:tcPr marL="45720" marR="45720" marT="9144" marB="9144" anchor="ctr">
+                    <a:solidFill>
+                      <a:srgbClr val="F1F3F4"/>
+                    </a:solidFill>
+                    <a:lnL w="0">
+                      <a:noFill/>
+                    </a:lnL>
+                    <a:lnR w="0">
+                      <a:noFill/>
+                    </a:lnR>
+                    <a:lnT w="0">
+                      <a:noFill/>
+                    </a:lnT>
+                    <a:lnB w="6350">
+                      <a:solidFill>
+                        <a:srgbClr val="DADCE0"/>
+                      </a:solidFill>
+                    </a:lnB>
+                  </a:tcPr>
+                </a:tc>
+              </a:tr>
+              <a:tr h="187452">
+                <a:tc rowSpan="3">
+                  <a:txBody>
+                    <a:bodyPr wrap="square"/>
+                    <a:lstStyle/>
+                    <a:p>
+                      <a:pPr algn="l">
+                        <a:defRPr sz="800"/>
+                      </a:pPr>
+                      <a:r>
+                        <a:rPr sz="800" b="0">
+                          <a:solidFill>
+                            <a:srgbClr val="202124"/>
+                          </a:solidFill>
+                          <a:latin typeface="Google Sans Flex"/>
+                        </a:rPr>
+                        <a:t>Chat → order (43)</a:t>
+                      </a:r>
+                    </a:p>
+                    <a:p>
+                      <a:pPr algn="l">
+                        <a:defRPr sz="800"/>
+                      </a:pPr>
+                      <a:r>
+                        <a:rPr sz="800" b="0">
+                          <a:solidFill>
+                            <a:srgbClr val="202124"/>
+                          </a:solidFill>
+                          <a:latin typeface="Google Sans Flex"/>
+                        </a:rPr>
+                        <a:t> </a:t>
+                      </a:r>
+                    </a:p>
+                    <a:p>
+                      <a:pPr algn="l">
+                        <a:defRPr sz="800"/>
+                      </a:pPr>
+                      <a:r>
+                        <a:rPr sz="800" b="0">
+                          <a:solidFill>
+                            <a:srgbClr val="202124"/>
+                          </a:solidFill>
+                          <a:latin typeface="Google Sans Flex"/>
+                        </a:rPr>
+                        <a:t> </a:t>
+                      </a:r>
+                    </a:p>
+                  </a:txBody>
+                  <a:tcPr marL="45720" marR="45720" marT="9144" marB="9144" anchor="ctr">
+                    <a:solidFill>
+                      <a:srgbClr val="FFFFFF"/>
+                    </a:solidFill>
+                    <a:lnL w="0">
+                      <a:noFill/>
+                    </a:lnL>
+                    <a:lnR w="0">
+                      <a:noFill/>
+                    </a:lnR>
+                    <a:lnT w="0">
+                      <a:noFill/>
+                    </a:lnT>
+                    <a:lnB w="6350">
+                      <a:solidFill>
+                        <a:srgbClr val="DADCE0"/>
+                      </a:solidFill>
+                    </a:lnB>
+                  </a:tcPr>
+                </a:tc>
+                <a:tc>
+                  <a:txBody>
+                    <a:bodyPr wrap="square"/>
+                    <a:lstStyle/>
+                    <a:p>
+                      <a:pPr algn="l">
+                        <a:defRPr sz="800"/>
+                      </a:pPr>
+                      <a:r>
+                        <a:rPr sz="800" b="0">
+                          <a:solidFill>
+                            <a:srgbClr val="202124"/>
+                          </a:solidFill>
+                          <a:latin typeface="Google Sans Flex"/>
+                        </a:rPr>
+                        <a:t>Fields correct</a:t>
+                      </a:r>
+                    </a:p>
+                  </a:txBody>
+                  <a:tcPr marL="45720" marR="45720" marT="9144" marB="9144" anchor="ctr">
+                    <a:solidFill>
+                      <a:srgbClr val="FFFFFF"/>
+                    </a:solidFill>
+                    <a:lnL w="0">
+                      <a:noFill/>
+                    </a:lnL>
+                    <a:lnR w="0">
+                      <a:noFill/>
+                    </a:lnR>
+                    <a:lnT w="0">
+                      <a:noFill/>
+                    </a:lnT>
+                    <a:lnB w="6350">
+                      <a:solidFill>
+                        <a:srgbClr val="DADCE0"/>
+                      </a:solidFill>
+                    </a:lnB>
+                  </a:tcPr>
+                </a:tc>
+                <a:tc>
+                  <a:txBody>
+                    <a:bodyPr wrap="square"/>
+                    <a:lstStyle/>
+                    <a:p>
+                      <a:pPr algn="r">
+                        <a:defRPr sz="800"/>
+                      </a:pPr>
+                      <a:r>
+                        <a:rPr sz="800" b="1">
+                          <a:solidFill>
+                            <a:srgbClr val="188038"/>
+                          </a:solidFill>
+                          <a:latin typeface="Google Sans Flex"/>
+                        </a:rPr>
+                        <a:t>951/954 (100%)</a:t>
+                      </a:r>
+                    </a:p>
+                  </a:txBody>
+                  <a:tcPr marL="45720" marR="45720" marT="9144" marB="9144" anchor="ctr">
+                    <a:solidFill>
+                      <a:srgbClr val="FFFFFF"/>
+                    </a:solidFill>
+                    <a:lnL w="0">
+                      <a:noFill/>
+                    </a:lnL>
+                    <a:lnR w="0">
+                      <a:noFill/>
+                    </a:lnR>
+                    <a:lnT w="0">
+                      <a:noFill/>
+                    </a:lnT>
+                    <a:lnB w="6350">
+                      <a:solidFill>
+                        <a:srgbClr val="DADCE0"/>
+                      </a:solidFill>
+                    </a:lnB>
+                  </a:tcPr>
+                </a:tc>
+              </a:tr>
+              <a:tr h="187452">
+                <a:tc vMerge="1">
+                  <a:txBody>
+                    <a:bodyPr wrap="square"/>
+                    <a:lstStyle/>
+                    <a:p/>
+                  </a:txBody>
+                  <a:tcPr marL="45720" marR="45720" marT="9144" marB="9144" anchor="ctr">
+                    <a:solidFill>
+                      <a:srgbClr val="FFFFFF"/>
+                    </a:solidFill>
+                    <a:lnL w="0">
+                      <a:noFill/>
+                    </a:lnL>
+                    <a:lnR w="0">
+                      <a:noFill/>
+                    </a:lnR>
+                    <a:lnT w="0">
+                      <a:noFill/>
+                    </a:lnT>
+                    <a:lnB w="6350">
+                      <a:solidFill>
+                        <a:srgbClr val="DADCE0"/>
+                      </a:solidFill>
+                    </a:lnB>
+                  </a:tcPr>
+                </a:tc>
+                <a:tc>
+                  <a:txBody>
+                    <a:bodyPr wrap="square"/>
+                    <a:lstStyle/>
+                    <a:p>
+                      <a:pPr algn="l">
+                        <a:defRPr sz="800"/>
+                      </a:pPr>
+                      <a:r>
+                        <a:rPr sz="800" b="0">
+                          <a:solidFill>
+                            <a:srgbClr val="202124"/>
+                          </a:solidFill>
+                          <a:latin typeface="Google Sans Flex"/>
+                        </a:rPr>
+                        <a:t>Checks caught / false alarms</a:t>
+                      </a:r>
+                    </a:p>
+                  </a:txBody>
+                  <a:tcPr marL="45720" marR="45720" marT="9144" marB="9144" anchor="ctr">
+                    <a:solidFill>
+                      <a:srgbClr val="FFFFFF"/>
+                    </a:solidFill>
+                    <a:lnL w="0">
+                      <a:noFill/>
+                    </a:lnL>
+                    <a:lnR w="0">
+                      <a:noFill/>
+                    </a:lnR>
+                    <a:lnT w="0">
+                      <a:noFill/>
+                    </a:lnT>
+                    <a:lnB w="6350">
+                      <a:solidFill>
+                        <a:srgbClr val="DADCE0"/>
+                      </a:solidFill>
+                    </a:lnB>
+                  </a:tcPr>
+                </a:tc>
+                <a:tc>
+                  <a:txBody>
+                    <a:bodyPr wrap="square"/>
+                    <a:lstStyle/>
+                    <a:p>
+                      <a:pPr algn="r">
+                        <a:defRPr sz="800"/>
+                      </a:pPr>
+                      <a:r>
+                        <a:rPr sz="800" b="1">
+                          <a:solidFill>
+                            <a:srgbClr val="188038"/>
+                          </a:solidFill>
+                          <a:latin typeface="Google Sans Flex"/>
+                        </a:rPr>
+                        <a:t>57/57 / 0</a:t>
+                      </a:r>
+                    </a:p>
+                  </a:txBody>
+                  <a:tcPr marL="45720" marR="45720" marT="9144" marB="9144" anchor="ctr">
+                    <a:solidFill>
+                      <a:srgbClr val="FFFFFF"/>
+                    </a:solidFill>
+                    <a:lnL w="0">
+                      <a:noFill/>
+                    </a:lnL>
+                    <a:lnR w="0">
+                      <a:noFill/>
+                    </a:lnR>
+                    <a:lnT w="0">
+                      <a:noFill/>
+                    </a:lnT>
+                    <a:lnB w="6350">
+                      <a:solidFill>
+                        <a:srgbClr val="DADCE0"/>
+                      </a:solidFill>
+                    </a:lnB>
+                  </a:tcPr>
+                </a:tc>
+              </a:tr>
+              <a:tr h="187452">
+                <a:tc vMerge="1">
+                  <a:txBody>
+                    <a:bodyPr wrap="square"/>
+                    <a:lstStyle/>
+                    <a:p/>
+                  </a:txBody>
+                  <a:tcPr marL="45720" marR="45720" marT="9144" marB="9144" anchor="ctr">
+                    <a:solidFill>
+                      <a:srgbClr val="FFFFFF"/>
+                    </a:solidFill>
+                    <a:lnL w="0">
+                      <a:noFill/>
+                    </a:lnL>
+                    <a:lnR w="0">
+                      <a:noFill/>
+                    </a:lnR>
+                    <a:lnT w="0">
+                      <a:noFill/>
+                    </a:lnT>
+                    <a:lnB w="6350">
+                      <a:solidFill>
+                        <a:srgbClr val="DADCE0"/>
+                      </a:solidFill>
+                    </a:lnB>
+                  </a:tcPr>
+                </a:tc>
+                <a:tc>
+                  <a:txBody>
+                    <a:bodyPr wrap="square"/>
+                    <a:lstStyle/>
+                    <a:p>
+                      <a:pPr algn="l">
+                        <a:defRPr sz="800"/>
+                      </a:pPr>
+                      <a:r>
+                        <a:rPr sz="800" b="0">
+                          <a:solidFill>
+                            <a:srgbClr val="202124"/>
+                          </a:solidFill>
+                          <a:latin typeface="Google Sans Flex"/>
+                        </a:rPr>
+                        <a:t>Injection: customer value used</a:t>
+                      </a:r>
+                    </a:p>
+                  </a:txBody>
+                  <a:tcPr marL="45720" marR="45720" marT="9144" marB="9144" anchor="ctr">
+                    <a:solidFill>
+                      <a:srgbClr val="FFFFFF"/>
+                    </a:solidFill>
+                    <a:lnL w="0">
+                      <a:noFill/>
+                    </a:lnL>
+                    <a:lnR w="0">
+                      <a:noFill/>
+                    </a:lnR>
+                    <a:lnT w="0">
+                      <a:noFill/>
+                    </a:lnT>
+                    <a:lnB w="6350">
+                      <a:solidFill>
+                        <a:srgbClr val="DADCE0"/>
+                      </a:solidFill>
+                    </a:lnB>
+                  </a:tcPr>
+                </a:tc>
+                <a:tc>
+                  <a:txBody>
+                    <a:bodyPr wrap="square"/>
+                    <a:lstStyle/>
+                    <a:p>
+                      <a:pPr algn="r">
+                        <a:defRPr sz="800"/>
+                      </a:pPr>
+                      <a:r>
+                        <a:rPr sz="800" b="1">
+                          <a:solidFill>
+                            <a:srgbClr val="188038"/>
+                          </a:solidFill>
+                          <a:latin typeface="Google Sans Flex"/>
+                        </a:rPr>
+                        <a:t>0</a:t>
+                      </a:r>
+                    </a:p>
+                  </a:txBody>
+                  <a:tcPr marL="45720" marR="45720" marT="9144" marB="9144" anchor="ctr">
+                    <a:solidFill>
+                      <a:srgbClr val="FFFFFF"/>
+                    </a:solidFill>
+                    <a:lnL w="0">
+                      <a:noFill/>
+                    </a:lnL>
+                    <a:lnR w="0">
+                      <a:noFill/>
+                    </a:lnR>
+                    <a:lnT w="0">
+                      <a:noFill/>
+                    </a:lnT>
+                    <a:lnB w="6350">
+                      <a:solidFill>
+                        <a:srgbClr val="DADCE0"/>
+                      </a:solidFill>
+                    </a:lnB>
+                  </a:tcPr>
+                </a:tc>
+              </a:tr>
+              <a:tr h="187452">
+                <a:tc>
+                  <a:txBody>
+                    <a:bodyPr wrap="square"/>
+                    <a:lstStyle/>
+                    <a:p>
+                      <a:pPr algn="l">
+                        <a:defRPr sz="800"/>
+                      </a:pPr>
+                      <a:r>
+                        <a:rPr sz="800" b="0">
+                          <a:solidFill>
+                            <a:srgbClr val="202124"/>
+                          </a:solidFill>
+                          <a:latin typeface="Google Sans Flex"/>
+                        </a:rPr>
+                        <a:t>Claim review (17)</a:t>
+                      </a:r>
+                    </a:p>
+                  </a:txBody>
+                  <a:tcPr marL="45720" marR="45720" marT="9144" marB="9144" anchor="ctr">
+                    <a:solidFill>
+                      <a:srgbClr val="FFFFFF"/>
+                    </a:solidFill>
+                    <a:lnL w="0">
+                      <a:noFill/>
+                    </a:lnL>
+                    <a:lnR w="0">
+                      <a:noFill/>
+                    </a:lnR>
+                    <a:lnT w="0">
+                      <a:noFill/>
+                    </a:lnT>
+                    <a:lnB w="6350">
+                      <a:solidFill>
+                        <a:srgbClr val="DADCE0"/>
+                      </a:solidFill>
+                    </a:lnB>
+                  </a:tcPr>
+                </a:tc>
+                <a:tc>
+                  <a:txBody>
+                    <a:bodyPr wrap="square"/>
+                    <a:lstStyle/>
+                    <a:p>
+                      <a:pPr algn="l">
+                        <a:defRPr sz="800"/>
+                      </a:pPr>
+                      <a:r>
+                        <a:rPr sz="800" b="0">
+                          <a:solidFill>
+                            <a:srgbClr val="202124"/>
+                          </a:solidFill>
+                          <a:latin typeface="Google Sans Flex"/>
+                        </a:rPr>
+                        <a:t>Acceptable action</a:t>
+                      </a:r>
+                    </a:p>
+                  </a:txBody>
+                  <a:tcPr marL="45720" marR="45720" marT="9144" marB="9144" anchor="ctr">
+                    <a:solidFill>
+                      <a:srgbClr val="FFFFFF"/>
+                    </a:solidFill>
+                    <a:lnL w="0">
+                      <a:noFill/>
+                    </a:lnL>
+                    <a:lnR w="0">
+                      <a:noFill/>
+                    </a:lnR>
+                    <a:lnT w="0">
+                      <a:noFill/>
+                    </a:lnT>
+                    <a:lnB w="6350">
+                      <a:solidFill>
+                        <a:srgbClr val="DADCE0"/>
+                      </a:solidFill>
+                    </a:lnB>
+                  </a:tcPr>
+                </a:tc>
+                <a:tc>
+                  <a:txBody>
+                    <a:bodyPr wrap="square"/>
+                    <a:lstStyle/>
+                    <a:p>
+                      <a:pPr algn="r">
+                        <a:defRPr sz="800"/>
+                      </a:pPr>
+                      <a:r>
+                        <a:rPr sz="800" b="1">
+                          <a:solidFill>
+                            <a:srgbClr val="188038"/>
+                          </a:solidFill>
+                          <a:latin typeface="Google Sans Flex"/>
+                        </a:rPr>
+                        <a:t>51/51 (100%)</a:t>
+                      </a:r>
+                    </a:p>
+                  </a:txBody>
+                  <a:tcPr marL="45720" marR="45720" marT="9144" marB="9144" anchor="ctr">
+                    <a:solidFill>
+                      <a:srgbClr val="FFFFFF"/>
+                    </a:solidFill>
+                    <a:lnL w="0">
+                      <a:noFill/>
+                    </a:lnL>
+                    <a:lnR w="0">
+                      <a:noFill/>
+                    </a:lnR>
+                    <a:lnT w="0">
+                      <a:noFill/>
+                    </a:lnT>
+                    <a:lnB w="6350">
+                      <a:solidFill>
+                        <a:srgbClr val="DADCE0"/>
+                      </a:solidFill>
+                    </a:lnB>
+                  </a:tcPr>
+                </a:tc>
+              </a:tr>
+              <a:tr h="187452">
+                <a:tc>
+                  <a:txBody>
+                    <a:bodyPr wrap="square"/>
+                    <a:lstStyle/>
+                    <a:p>
+                      <a:pPr algn="l">
+                        <a:defRPr sz="800"/>
+                      </a:pPr>
+                      <a:r>
+                        <a:rPr sz="800" b="0">
+                          <a:solidFill>
+                            <a:srgbClr val="202124"/>
+                          </a:solidFill>
+                          <a:latin typeface="Google Sans Flex"/>
+                        </a:rPr>
+                        <a:t>Packing photos (20)</a:t>
+                      </a:r>
+                    </a:p>
+                  </a:txBody>
+                  <a:tcPr marL="45720" marR="45720" marT="9144" marB="9144" anchor="ctr">
+                    <a:solidFill>
+                      <a:srgbClr val="FFFFFF"/>
+                    </a:solidFill>
+                    <a:lnL w="0">
+                      <a:noFill/>
+                    </a:lnL>
+                    <a:lnR w="0">
+                      <a:noFill/>
+                    </a:lnR>
+                    <a:lnT w="0">
+                      <a:noFill/>
+                    </a:lnT>
+                    <a:lnB w="6350">
+                      <a:solidFill>
+                        <a:srgbClr val="DADCE0"/>
+                      </a:solidFill>
+                    </a:lnB>
+                  </a:tcPr>
+                </a:tc>
+                <a:tc>
+                  <a:txBody>
+                    <a:bodyPr wrap="square"/>
+                    <a:lstStyle/>
+                    <a:p>
+                      <a:pPr algn="l">
+                        <a:defRPr sz="800"/>
+                      </a:pPr>
+                      <a:r>
+                        <a:rPr sz="800" b="0">
+                          <a:solidFill>
+                            <a:srgbClr val="202124"/>
+                          </a:solidFill>
+                          <a:latin typeface="Google Sans Flex"/>
+                        </a:rPr>
+                        <a:t>Line result / false match</a:t>
+                      </a:r>
+                    </a:p>
+                  </a:txBody>
+                  <a:tcPr marL="45720" marR="45720" marT="9144" marB="9144" anchor="ctr">
+                    <a:solidFill>
+                      <a:srgbClr val="FFFFFF"/>
+                    </a:solidFill>
+                    <a:lnL w="0">
+                      <a:noFill/>
+                    </a:lnL>
+                    <a:lnR w="0">
+                      <a:noFill/>
+                    </a:lnR>
+                    <a:lnT w="0">
+                      <a:noFill/>
+                    </a:lnT>
+                    <a:lnB w="6350">
+                      <a:solidFill>
+                        <a:srgbClr val="DADCE0"/>
+                      </a:solidFill>
+                    </a:lnB>
+                  </a:tcPr>
+                </a:tc>
+                <a:tc>
+                  <a:txBody>
+                    <a:bodyPr wrap="square"/>
+                    <a:lstStyle/>
+                    <a:p>
+                      <a:pPr algn="r">
+                        <a:defRPr sz="800"/>
+                      </a:pPr>
+                      <a:r>
+                        <a:rPr sz="800" b="1">
+                          <a:solidFill>
+                            <a:srgbClr val="188038"/>
+                          </a:solidFill>
+                          <a:latin typeface="Google Sans Flex"/>
+                        </a:rPr>
+                        <a:t>66/66 / 0</a:t>
+                      </a:r>
+                    </a:p>
+                  </a:txBody>
+                  <a:tcPr marL="45720" marR="45720" marT="9144" marB="9144" anchor="ctr">
+                    <a:solidFill>
+                      <a:srgbClr val="FFFFFF"/>
+                    </a:solidFill>
+                    <a:lnL w="0">
+                      <a:noFill/>
+                    </a:lnL>
+                    <a:lnR w="0">
+                      <a:noFill/>
+                    </a:lnR>
+                    <a:lnT w="0">
+                      <a:noFill/>
+                    </a:lnT>
+                    <a:lnB w="6350">
+                      <a:solidFill>
+                        <a:srgbClr val="DADCE0"/>
+                      </a:solidFill>
+                    </a:lnB>
+                  </a:tcPr>
+                </a:tc>
+              </a:tr>
+              <a:tr h="187452">
+                <a:tc>
+                  <a:txBody>
+                    <a:bodyPr wrap="square"/>
+                    <a:lstStyle/>
+                    <a:p>
+                      <a:pPr algn="l">
+                        <a:defRPr sz="800"/>
+                      </a:pPr>
+                      <a:r>
+                        <a:rPr sz="800" b="0">
+                          <a:solidFill>
+                            <a:srgbClr val="202124"/>
+                          </a:solidFill>
+                          <a:latin typeface="Google Sans Flex"/>
+                        </a:rPr>
+                        <a:t>GCash receipts (4)</a:t>
+                      </a:r>
+                    </a:p>
+                  </a:txBody>
+                  <a:tcPr marL="45720" marR="45720" marT="9144" marB="9144" anchor="ctr">
+                    <a:solidFill>
+                      <a:srgbClr val="FFFFFF"/>
+                    </a:solidFill>
+                    <a:lnL w="0">
+                      <a:noFill/>
+                    </a:lnL>
+                    <a:lnR w="0">
+                      <a:noFill/>
+                    </a:lnR>
+                    <a:lnT w="0">
+                      <a:noFill/>
+                    </a:lnT>
+                    <a:lnB w="6350">
+                      <a:solidFill>
+                        <a:srgbClr val="DADCE0"/>
+                      </a:solidFill>
+                    </a:lnB>
+                  </a:tcPr>
+                </a:tc>
+                <a:tc>
+                  <a:txBody>
+                    <a:bodyPr wrap="square"/>
+                    <a:lstStyle/>
+                    <a:p>
+                      <a:pPr algn="l">
+                        <a:defRPr sz="800"/>
+                      </a:pPr>
+                      <a:r>
+                        <a:rPr sz="800" b="0">
+                          <a:solidFill>
+                            <a:srgbClr val="202124"/>
+                          </a:solidFill>
+                          <a:latin typeface="Google Sans Flex"/>
+                        </a:rPr>
+                        <a:t>Checks / planted text passed</a:t>
+                      </a:r>
+                    </a:p>
+                  </a:txBody>
+                  <a:tcPr marL="45720" marR="45720" marT="9144" marB="9144" anchor="ctr">
+                    <a:solidFill>
+                      <a:srgbClr val="FFFFFF"/>
+                    </a:solidFill>
+                    <a:lnL w="0">
+                      <a:noFill/>
+                    </a:lnL>
+                    <a:lnR w="0">
+                      <a:noFill/>
+                    </a:lnR>
+                    <a:lnT w="0">
+                      <a:noFill/>
+                    </a:lnT>
+                    <a:lnB w="6350">
+                      <a:solidFill>
+                        <a:srgbClr val="DADCE0"/>
+                      </a:solidFill>
+                    </a:lnB>
+                  </a:tcPr>
+                </a:tc>
+                <a:tc>
+                  <a:txBody>
+                    <a:bodyPr wrap="square"/>
+                    <a:lstStyle/>
+                    <a:p>
+                      <a:pPr algn="r">
+                        <a:defRPr sz="800"/>
+                      </a:pPr>
+                      <a:r>
+                        <a:rPr sz="800" b="1">
+                          <a:solidFill>
+                            <a:srgbClr val="188038"/>
+                          </a:solidFill>
+                          <a:latin typeface="Google Sans Flex"/>
+                        </a:rPr>
+                        <a:t>12/12 / 0</a:t>
+                      </a:r>
+                    </a:p>
+                  </a:txBody>
+                  <a:tcPr marL="45720" marR="45720" marT="9144" marB="9144" anchor="ctr">
+                    <a:solidFill>
+                      <a:srgbClr val="FFFFFF"/>
+                    </a:solidFill>
+                    <a:lnL w="0">
+                      <a:noFill/>
+                    </a:lnL>
+                    <a:lnR w="0">
+                      <a:noFill/>
+                    </a:lnR>
+                    <a:lnT w="0">
+                      <a:noFill/>
+                    </a:lnT>
+                    <a:lnB w="6350">
+                      <a:solidFill>
+                        <a:srgbClr val="DADCE0"/>
+                      </a:solidFill>
+                    </a:lnB>
+                  </a:tcPr>
+                </a:tc>
+              </a:tr>
+            </a:tbl>
+          </a:graphicData>
+        </a:graphic>
+      </p:graphicFrame>
+      <p:sp>
+        <p:nvSpPr>
+          <p:cNvPr id="151" name="Speed heading"/>
+          <p:cNvSpPr txBox="1"/>
+          <p:nvPr/>
+        </p:nvSpPr>
+        <p:spPr>
+          <a:xfrm>
+            <a:off x="4370832" y="2075688"/>
+            <a:ext cx="4425696" cy="182880"/>
+          </a:xfrm>
+          <a:prstGeom prst="rect">
+            <a:avLst/>
+          </a:prstGeom>
+          <a:noFill/>
+        </p:spPr>
+        <p:txBody>
+          <a:bodyPr wrap="square" anchor="t" lIns="0" rIns="0" tIns="0" bIns="0">
+            <a:spAutoFit/>
+          </a:bodyPr>
+          <a:lstStyle/>
+          <a:p>
+            <a:pPr algn="l"/>
+            <a:r>
+              <a:rPr sz="950" b="0">
+                <a:solidFill>
+                  <a:srgbClr val="202124"/>
+                </a:solidFill>
+                <a:latin typeface="Google Sans Flex Medium"/>
+              </a:rPr>
+              <a:t>Speed, tokens and cost per AI action</a:t>
+            </a:r>
+            <a:r>
+              <a:rPr sz="750" b="0">
+                <a:solidFill>
+                  <a:srgbClr val="5F6368"/>
+                </a:solidFill>
+                <a:latin typeface="Google Sans Flex"/>
+              </a:rPr>
+              <a:t>  ·  p50 / p95</a:t>
+            </a:r>
+          </a:p>
+        </p:txBody>
+      </p:sp>
+      <p:graphicFrame>
+        <p:nvGraphicFramePr>
+          <p:cNvPr id="152" name="Speed table"/>
+          <p:cNvGraphicFramePr>
+            <a:graphicFrameLocks noGrp="1"/>
+          </p:cNvGraphicFramePr>
+          <p:nvPr/>
+        </p:nvGraphicFramePr>
+        <p:xfrm>
+          <a:off x="4370832" y="2286000"/>
+          <a:ext cx="4425695" cy="1312164"/>
+        </p:xfrm>
+        <a:graphic>
+          <a:graphicData uri="http://schemas.openxmlformats.org/drawingml/2006/table">
+            <a:tbl>
+              <a:tblPr firstRow="1" bandRow="0"/>
+              <a:tblGrid>
+                <a:gridCol w="1261872"/>
+                <a:gridCol w="914400"/>
+                <a:gridCol w="1042415"/>
+                <a:gridCol w="566928"/>
+                <a:gridCol w="640080"/>
+              </a:tblGrid>
+              <a:tr h="187452">
+                <a:tc>
+                  <a:txBody>
+                    <a:bodyPr wrap="square"/>
+                    <a:lstStyle/>
+                    <a:p>
+                      <a:pPr algn="l">
+                        <a:defRPr sz="700"/>
+                      </a:pPr>
+                      <a:r>
+                        <a:rPr sz="700" b="0">
+                          <a:solidFill>
+                            <a:srgbClr val="5F6368"/>
+                          </a:solidFill>
+                          <a:latin typeface="Google Sans Flex"/>
+                        </a:rPr>
+                        <a:t>Action</a:t>
+                      </a:r>
+                    </a:p>
+                  </a:txBody>
+                  <a:tcPr marL="45720" marR="45720" marT="9144" marB="9144" anchor="ctr">
+                    <a:solidFill>
+                      <a:srgbClr val="F1F3F4"/>
+                    </a:solidFill>
+                    <a:lnL w="0">
+                      <a:noFill/>
+                    </a:lnL>
+                    <a:lnR w="0">
+                      <a:noFill/>
+                    </a:lnR>
+                    <a:lnT w="0">
+                      <a:noFill/>
+                    </a:lnT>
+                    <a:lnB w="6350">
+                      <a:solidFill>
+                        <a:srgbClr val="DADCE0"/>
+                      </a:solidFill>
+                    </a:lnB>
+                  </a:tcPr>
+                </a:tc>
+                <a:tc>
+                  <a:txBody>
+                    <a:bodyPr wrap="square"/>
+                    <a:lstStyle/>
+                    <a:p>
+                      <a:pPr algn="r">
+                        <a:defRPr sz="700"/>
+                      </a:pPr>
+                      <a:r>
+                        <a:rPr sz="700" b="0">
+                          <a:solidFill>
+                            <a:srgbClr val="5F6368"/>
+                          </a:solidFill>
+                          <a:latin typeface="Google Sans Flex"/>
+                        </a:rPr>
+                        <a:t>Live app</a:t>
+                      </a:r>
+                    </a:p>
+                  </a:txBody>
+                  <a:tcPr marL="45720" marR="45720" marT="9144" marB="9144" anchor="ctr">
+                    <a:solidFill>
+                      <a:srgbClr val="F1F3F4"/>
+                    </a:solidFill>
+                    <a:lnL w="0">
+                      <a:noFill/>
+                    </a:lnL>
+                    <a:lnR w="0">
+                      <a:noFill/>
+                    </a:lnR>
+                    <a:lnT w="0">
+                      <a:noFill/>
+                    </a:lnT>
+                    <a:lnB w="6350">
+                      <a:solidFill>
+                        <a:srgbClr val="DADCE0"/>
+                      </a:solidFill>
+                    </a:lnB>
+                  </a:tcPr>
+                </a:tc>
+                <a:tc>
+                  <a:txBody>
+                    <a:bodyPr wrap="square"/>
+                    <a:lstStyle/>
+                    <a:p>
+                      <a:pPr algn="r">
+                        <a:defRPr sz="700"/>
+                      </a:pPr>
+                      <a:r>
+                        <a:rPr sz="700" b="0">
+                          <a:solidFill>
+                            <a:srgbClr val="5F6368"/>
+                          </a:solidFill>
+                          <a:latin typeface="Google Sans Flex"/>
+                        </a:rPr>
+                        <a:t>Model only (eval)</a:t>
+                      </a:r>
+                    </a:p>
+                  </a:txBody>
+                  <a:tcPr marL="45720" marR="45720" marT="9144" marB="9144" anchor="ctr">
+                    <a:solidFill>
+                      <a:srgbClr val="F1F3F4"/>
+                    </a:solidFill>
+                    <a:lnL w="0">
+                      <a:noFill/>
+                    </a:lnL>
+                    <a:lnR w="0">
+                      <a:noFill/>
+                    </a:lnR>
+                    <a:lnT w="0">
+                      <a:noFill/>
+                    </a:lnT>
+                    <a:lnB w="6350">
+                      <a:solidFill>
+                        <a:srgbClr val="DADCE0"/>
+                      </a:solidFill>
+                    </a:lnB>
+                  </a:tcPr>
+                </a:tc>
+                <a:tc>
+                  <a:txBody>
+                    <a:bodyPr wrap="square"/>
+                    <a:lstStyle/>
+                    <a:p>
+                      <a:pPr algn="r">
+                        <a:defRPr sz="700"/>
+                      </a:pPr>
+                      <a:r>
+                        <a:rPr sz="700" b="0">
+                          <a:solidFill>
+                            <a:srgbClr val="5F6368"/>
+                          </a:solidFill>
+                          <a:latin typeface="Google Sans Flex"/>
+                        </a:rPr>
+                        <a:t>Tokens</a:t>
+                      </a:r>
+                    </a:p>
+                  </a:txBody>
+                  <a:tcPr marL="45720" marR="45720" marT="9144" marB="9144" anchor="ctr">
+                    <a:solidFill>
+                      <a:srgbClr val="F1F3F4"/>
+                    </a:solidFill>
+                    <a:lnL w="0">
+                      <a:noFill/>
+                    </a:lnL>
+                    <a:lnR w="0">
+                      <a:noFill/>
+                    </a:lnR>
+                    <a:lnT w="0">
+                      <a:noFill/>
+                    </a:lnT>
+                    <a:lnB w="6350">
+                      <a:solidFill>
+                        <a:srgbClr val="DADCE0"/>
+                      </a:solidFill>
+                    </a:lnB>
+                  </a:tcPr>
+                </a:tc>
+                <a:tc>
+                  <a:txBody>
+                    <a:bodyPr wrap="square"/>
+                    <a:lstStyle/>
+                    <a:p>
+                      <a:pPr algn="r">
+                        <a:defRPr sz="700"/>
+                      </a:pPr>
+                      <a:r>
+                        <a:rPr sz="700" b="0">
+                          <a:solidFill>
+                            <a:srgbClr val="5F6368"/>
+                          </a:solidFill>
+                          <a:latin typeface="Google Sans Flex"/>
+                        </a:rPr>
+                        <a:t>Cost</a:t>
+                      </a:r>
+                    </a:p>
+                  </a:txBody>
+                  <a:tcPr marL="45720" marR="45720" marT="9144" marB="9144" anchor="ctr">
+                    <a:solidFill>
+                      <a:srgbClr val="F1F3F4"/>
+                    </a:solidFill>
+                    <a:lnL w="0">
+                      <a:noFill/>
+                    </a:lnL>
+                    <a:lnR w="0">
+                      <a:noFill/>
+                    </a:lnR>
+                    <a:lnT w="0">
+                      <a:noFill/>
+                    </a:lnT>
+                    <a:lnB w="6350">
+                      <a:solidFill>
+                        <a:srgbClr val="DADCE0"/>
+                      </a:solidFill>
+                    </a:lnB>
+                  </a:tcPr>
+                </a:tc>
+              </a:tr>
+              <a:tr h="187452">
+                <a:tc>
+                  <a:txBody>
+                    <a:bodyPr wrap="square"/>
+                    <a:lstStyle/>
+                    <a:p>
+                      <a:pPr algn="l">
+                        <a:defRPr sz="750"/>
+                      </a:pPr>
+                      <a:r>
+                        <a:rPr sz="750" b="0">
+                          <a:solidFill>
+                            <a:srgbClr val="202124"/>
+                          </a:solidFill>
+                          <a:latin typeface="Google Sans Flex"/>
+                        </a:rPr>
+                        <a:t>Draft order</a:t>
+                      </a:r>
+                    </a:p>
+                  </a:txBody>
+                  <a:tcPr marL="45720" marR="45720" marT="9144" marB="9144" anchor="ctr">
+                    <a:solidFill>
+                      <a:srgbClr val="FFFFFF"/>
+                    </a:solidFill>
+                    <a:lnL w="0">
+                      <a:noFill/>
+                    </a:lnL>
+                    <a:lnR w="0">
+                      <a:noFill/>
+                    </a:lnR>
+                    <a:lnT w="0">
+                      <a:noFill/>
+                    </a:lnT>
+                    <a:lnB w="6350">
+                      <a:solidFill>
+                        <a:srgbClr val="DADCE0"/>
+                      </a:solidFill>
+                    </a:lnB>
+                  </a:tcPr>
+                </a:tc>
+                <a:tc>
+                  <a:txBody>
+                    <a:bodyPr wrap="square"/>
+                    <a:lstStyle/>
+                    <a:p>
+                      <a:pPr algn="r">
+                        <a:defRPr sz="750"/>
+                      </a:pPr>
+                      <a:r>
+                        <a:rPr sz="750" b="0">
+                          <a:solidFill>
+                            <a:srgbClr val="202124"/>
+                          </a:solidFill>
+                          <a:latin typeface="Google Sans Flex"/>
+                        </a:rPr>
+                        <a:t>5.8 s / 8.6 s</a:t>
+                      </a:r>
+                    </a:p>
+                  </a:txBody>
+                  <a:tcPr marL="45720" marR="45720" marT="9144" marB="9144" anchor="ctr">
+                    <a:solidFill>
+                      <a:srgbClr val="FFFFFF"/>
+                    </a:solidFill>
+                    <a:lnL w="0">
+                      <a:noFill/>
+                    </a:lnL>
+                    <a:lnR w="0">
+                      <a:noFill/>
+                    </a:lnR>
+                    <a:lnT w="0">
+                      <a:noFill/>
+                    </a:lnT>
+                    <a:lnB w="6350">
+                      <a:solidFill>
+                        <a:srgbClr val="DADCE0"/>
+                      </a:solidFill>
+                    </a:lnB>
+                  </a:tcPr>
+                </a:tc>
+                <a:tc rowSpan="2">
+                  <a:txBody>
+                    <a:bodyPr wrap="square"/>
+                    <a:lstStyle/>
+                    <a:p>
+                      <a:pPr algn="r">
+                        <a:defRPr sz="750"/>
+                      </a:pPr>
+                      <a:r>
+                        <a:rPr sz="750" b="0">
+                          <a:solidFill>
+                            <a:srgbClr val="202124"/>
+                          </a:solidFill>
+                          <a:latin typeface="Google Sans Flex"/>
+                        </a:rPr>
+                        <a:t>3.2 s / 10.9 s (both)</a:t>
+                      </a:r>
+                    </a:p>
+                    <a:p>
+                      <a:pPr algn="r">
+                        <a:defRPr sz="750"/>
+                      </a:pPr>
+                      <a:r>
+                        <a:rPr sz="750" b="0">
+                          <a:solidFill>
+                            <a:srgbClr val="202124"/>
+                          </a:solidFill>
+                          <a:latin typeface="Google Sans Flex"/>
+                        </a:rPr>
+                        <a:t> </a:t>
+                      </a:r>
+                    </a:p>
+                  </a:txBody>
+                  <a:tcPr marL="45720" marR="45720" marT="9144" marB="9144" anchor="ctr">
+                    <a:solidFill>
+                      <a:srgbClr val="FFFFFF"/>
+                    </a:solidFill>
+                    <a:lnL w="0">
+                      <a:noFill/>
+                    </a:lnL>
+                    <a:lnR w="0">
+                      <a:noFill/>
+                    </a:lnR>
+                    <a:lnT w="0">
+                      <a:noFill/>
+                    </a:lnT>
+                    <a:lnB w="6350">
+                      <a:solidFill>
+                        <a:srgbClr val="DADCE0"/>
+                      </a:solidFill>
+                    </a:lnB>
+                  </a:tcPr>
+                </a:tc>
+                <a:tc rowSpan="2">
+                  <a:txBody>
+                    <a:bodyPr wrap="square"/>
+                    <a:lstStyle/>
+                    <a:p>
+                      <a:pPr algn="r">
+                        <a:defRPr sz="750"/>
+                      </a:pPr>
+                      <a:r>
+                        <a:rPr sz="750" b="0">
+                          <a:solidFill>
+                            <a:srgbClr val="202124"/>
+                          </a:solidFill>
+                          <a:latin typeface="Google Sans Flex"/>
+                        </a:rPr>
+                        <a:t>2,638</a:t>
+                      </a:r>
+                    </a:p>
+                    <a:p>
+                      <a:pPr algn="r">
+                        <a:defRPr sz="750"/>
+                      </a:pPr>
+                      <a:r>
+                        <a:rPr sz="750" b="0">
+                          <a:solidFill>
+                            <a:srgbClr val="202124"/>
+                          </a:solidFill>
+                          <a:latin typeface="Google Sans Flex"/>
+                        </a:rPr>
+                        <a:t> </a:t>
+                      </a:r>
+                    </a:p>
+                  </a:txBody>
+                  <a:tcPr marL="45720" marR="45720" marT="9144" marB="9144" anchor="ctr">
+                    <a:solidFill>
+                      <a:srgbClr val="FFFFFF"/>
+                    </a:solidFill>
+                    <a:lnL w="0">
+                      <a:noFill/>
+                    </a:lnL>
+                    <a:lnR w="0">
+                      <a:noFill/>
+                    </a:lnR>
+                    <a:lnT w="0">
+                      <a:noFill/>
+                    </a:lnT>
+                    <a:lnB w="6350">
+                      <a:solidFill>
+                        <a:srgbClr val="DADCE0"/>
+                      </a:solidFill>
+                    </a:lnB>
+                  </a:tcPr>
+                </a:tc>
+                <a:tc rowSpan="2">
+                  <a:txBody>
+                    <a:bodyPr wrap="square"/>
+                    <a:lstStyle/>
+                    <a:p>
+                      <a:pPr algn="r">
+                        <a:defRPr sz="750"/>
+                      </a:pPr>
+                      <a:r>
+                        <a:rPr sz="750" b="0">
+                          <a:solidFill>
+                            <a:srgbClr val="202124"/>
+                          </a:solidFill>
+                          <a:latin typeface="Google Sans Flex"/>
+                        </a:rPr>
+                        <a:t>$0.0057</a:t>
+                      </a:r>
+                    </a:p>
+                    <a:p>
+                      <a:pPr algn="r">
+                        <a:defRPr sz="750"/>
+                      </a:pPr>
+                      <a:r>
+                        <a:rPr sz="750" b="0">
+                          <a:solidFill>
+                            <a:srgbClr val="202124"/>
+                          </a:solidFill>
+                          <a:latin typeface="Google Sans Flex"/>
+                        </a:rPr>
+                        <a:t> </a:t>
+                      </a:r>
+                    </a:p>
+                  </a:txBody>
+                  <a:tcPr marL="45720" marR="45720" marT="9144" marB="9144" anchor="ctr">
+                    <a:solidFill>
+                      <a:srgbClr val="FFFFFF"/>
+                    </a:solidFill>
+                    <a:lnL w="0">
+                      <a:noFill/>
+                    </a:lnL>
+                    <a:lnR w="0">
+                      <a:noFill/>
+                    </a:lnR>
+                    <a:lnT w="0">
+                      <a:noFill/>
+                    </a:lnT>
+                    <a:lnB w="6350">
+                      <a:solidFill>
+                        <a:srgbClr val="DADCE0"/>
+                      </a:solidFill>
+                    </a:lnB>
+                  </a:tcPr>
+                </a:tc>
+              </a:tr>
+              <a:tr h="187452">
+                <a:tc>
+                  <a:txBody>
+                    <a:bodyPr wrap="square"/>
+                    <a:lstStyle/>
+                    <a:p>
+                      <a:pPr algn="l">
+                        <a:defRPr sz="750"/>
+                      </a:pPr>
+                      <a:r>
+                        <a:rPr sz="750" b="0">
+                          <a:solidFill>
+                            <a:srgbClr val="202124"/>
+                          </a:solidFill>
+                          <a:latin typeface="Google Sans Flex"/>
+                        </a:rPr>
+                        <a:t>Checks before shipping</a:t>
+                      </a:r>
+                    </a:p>
+                  </a:txBody>
+                  <a:tcPr marL="45720" marR="45720" marT="9144" marB="9144" anchor="ctr">
+                    <a:solidFill>
+                      <a:srgbClr val="FFFFFF"/>
+                    </a:solidFill>
+                    <a:lnL w="0">
+                      <a:noFill/>
+                    </a:lnL>
+                    <a:lnR w="0">
+                      <a:noFill/>
+                    </a:lnR>
+                    <a:lnT w="0">
+                      <a:noFill/>
+                    </a:lnT>
+                    <a:lnB w="6350">
+                      <a:solidFill>
+                        <a:srgbClr val="DADCE0"/>
+                      </a:solidFill>
+                    </a:lnB>
+                  </a:tcPr>
+                </a:tc>
+                <a:tc>
+                  <a:txBody>
+                    <a:bodyPr wrap="square"/>
+                    <a:lstStyle/>
+                    <a:p>
+                      <a:pPr algn="r">
+                        <a:defRPr sz="750"/>
+                      </a:pPr>
+                      <a:r>
+                        <a:rPr sz="750" b="0">
+                          <a:solidFill>
+                            <a:srgbClr val="202124"/>
+                          </a:solidFill>
+                          <a:latin typeface="Google Sans Flex"/>
+                        </a:rPr>
+                        <a:t>3.1 s / 9.9 s</a:t>
+                      </a:r>
+                    </a:p>
+                  </a:txBody>
+                  <a:tcPr marL="45720" marR="45720" marT="9144" marB="9144" anchor="ctr">
+                    <a:solidFill>
+                      <a:srgbClr val="FFFFFF"/>
+                    </a:solidFill>
+                    <a:lnL w="0">
+                      <a:noFill/>
+                    </a:lnL>
+                    <a:lnR w="0">
+                      <a:noFill/>
+                    </a:lnR>
+                    <a:lnT w="0">
+                      <a:noFill/>
+                    </a:lnT>
+                    <a:lnB w="6350">
+                      <a:solidFill>
+                        <a:srgbClr val="DADCE0"/>
+                      </a:solidFill>
+                    </a:lnB>
+                  </a:tcPr>
+                </a:tc>
+                <a:tc vMerge="1">
+                  <a:txBody>
+                    <a:bodyPr wrap="square"/>
+                    <a:lstStyle/>
+                    <a:p/>
+                  </a:txBody>
+                  <a:tcPr marL="45720" marR="45720" marT="9144" marB="9144" anchor="ctr">
+                    <a:solidFill>
+                      <a:srgbClr val="FFFFFF"/>
+                    </a:solidFill>
+                    <a:lnL w="0">
+                      <a:noFill/>
+                    </a:lnL>
+                    <a:lnR w="0">
+                      <a:noFill/>
+                    </a:lnR>
+                    <a:lnT w="0">
+                      <a:noFill/>
+                    </a:lnT>
+                    <a:lnB w="6350">
+                      <a:solidFill>
+                        <a:srgbClr val="DADCE0"/>
+                      </a:solidFill>
+                    </a:lnB>
+                  </a:tcPr>
+                </a:tc>
+                <a:tc vMerge="1">
+                  <a:txBody>
+                    <a:bodyPr wrap="square"/>
+                    <a:lstStyle/>
+                    <a:p/>
+                  </a:txBody>
+                  <a:tcPr marL="45720" marR="45720" marT="9144" marB="9144" anchor="ctr">
+                    <a:solidFill>
+                      <a:srgbClr val="FFFFFF"/>
+                    </a:solidFill>
+                    <a:lnL w="0">
+                      <a:noFill/>
+                    </a:lnL>
+                    <a:lnR w="0">
+                      <a:noFill/>
+                    </a:lnR>
+                    <a:lnT w="0">
+                      <a:noFill/>
+                    </a:lnT>
+                    <a:lnB w="6350">
+                      <a:solidFill>
+                        <a:srgbClr val="DADCE0"/>
+                      </a:solidFill>
+                    </a:lnB>
+                  </a:tcPr>
+                </a:tc>
+                <a:tc vMerge="1">
+                  <a:txBody>
+                    <a:bodyPr wrap="square"/>
+                    <a:lstStyle/>
+                    <a:p/>
+                  </a:txBody>
+                  <a:tcPr marL="45720" marR="45720" marT="9144" marB="9144" anchor="ctr">
+                    <a:solidFill>
+                      <a:srgbClr val="FFFFFF"/>
+                    </a:solidFill>
+                    <a:lnL w="0">
+                      <a:noFill/>
+                    </a:lnL>
+                    <a:lnR w="0">
+                      <a:noFill/>
+                    </a:lnR>
+                    <a:lnT w="0">
+                      <a:noFill/>
+                    </a:lnT>
+                    <a:lnB w="6350">
+                      <a:solidFill>
+                        <a:srgbClr val="DADCE0"/>
+                      </a:solidFill>
+                    </a:lnB>
+                  </a:tcPr>
+                </a:tc>
+              </a:tr>
+              <a:tr h="187452">
+                <a:tc>
+                  <a:txBody>
+                    <a:bodyPr wrap="square"/>
+                    <a:lstStyle/>
+                    <a:p>
+                      <a:pPr algn="l">
+                        <a:defRPr sz="750"/>
+                      </a:pPr>
+                      <a:r>
+                        <a:rPr sz="750" b="0">
+                          <a:solidFill>
+                            <a:srgbClr val="202124"/>
+                          </a:solidFill>
+                          <a:latin typeface="Google Sans Flex"/>
+                        </a:rPr>
+                        <a:t>Packing photo check</a:t>
+                      </a:r>
+                    </a:p>
+                  </a:txBody>
+                  <a:tcPr marL="45720" marR="45720" marT="9144" marB="9144" anchor="ctr">
+                    <a:solidFill>
+                      <a:srgbClr val="FFFFFF"/>
+                    </a:solidFill>
+                    <a:lnL w="0">
+                      <a:noFill/>
+                    </a:lnL>
+                    <a:lnR w="0">
+                      <a:noFill/>
+                    </a:lnR>
+                    <a:lnT w="0">
+                      <a:noFill/>
+                    </a:lnT>
+                    <a:lnB w="6350">
+                      <a:solidFill>
+                        <a:srgbClr val="DADCE0"/>
+                      </a:solidFill>
+                    </a:lnB>
+                  </a:tcPr>
+                </a:tc>
+                <a:tc>
+                  <a:txBody>
+                    <a:bodyPr wrap="square"/>
+                    <a:lstStyle/>
+                    <a:p>
+                      <a:pPr algn="r">
+                        <a:defRPr sz="750"/>
+                      </a:pPr>
+                      <a:r>
+                        <a:rPr sz="750" b="0">
+                          <a:solidFill>
+                            <a:srgbClr val="202124"/>
+                          </a:solidFill>
+                          <a:latin typeface="Google Sans Flex"/>
+                        </a:rPr>
+                        <a:t>–</a:t>
+                      </a:r>
+                    </a:p>
+                  </a:txBody>
+                  <a:tcPr marL="45720" marR="45720" marT="9144" marB="9144" anchor="ctr">
+                    <a:solidFill>
+                      <a:srgbClr val="FFFFFF"/>
+                    </a:solidFill>
+                    <a:lnL w="0">
+                      <a:noFill/>
+                    </a:lnL>
+                    <a:lnR w="0">
+                      <a:noFill/>
+                    </a:lnR>
+                    <a:lnT w="0">
+                      <a:noFill/>
+                    </a:lnT>
+                    <a:lnB w="6350">
+                      <a:solidFill>
+                        <a:srgbClr val="DADCE0"/>
+                      </a:solidFill>
+                    </a:lnB>
+                  </a:tcPr>
+                </a:tc>
+                <a:tc>
+                  <a:txBody>
+                    <a:bodyPr wrap="square"/>
+                    <a:lstStyle/>
+                    <a:p>
+                      <a:pPr algn="r">
+                        <a:defRPr sz="750"/>
+                      </a:pPr>
+                      <a:r>
+                        <a:rPr sz="750" b="0">
+                          <a:solidFill>
+                            <a:srgbClr val="202124"/>
+                          </a:solidFill>
+                          <a:latin typeface="Google Sans Flex"/>
+                        </a:rPr>
+                        <a:t>3.8 s / 8.4 s</a:t>
+                      </a:r>
+                    </a:p>
+                  </a:txBody>
+                  <a:tcPr marL="45720" marR="45720" marT="9144" marB="9144" anchor="ctr">
+                    <a:solidFill>
+                      <a:srgbClr val="FFFFFF"/>
+                    </a:solidFill>
+                    <a:lnL w="0">
+                      <a:noFill/>
+                    </a:lnL>
+                    <a:lnR w="0">
+                      <a:noFill/>
+                    </a:lnR>
+                    <a:lnT w="0">
+                      <a:noFill/>
+                    </a:lnT>
+                    <a:lnB w="6350">
+                      <a:solidFill>
+                        <a:srgbClr val="DADCE0"/>
+                      </a:solidFill>
+                    </a:lnB>
+                  </a:tcPr>
+                </a:tc>
+                <a:tc>
+                  <a:txBody>
+                    <a:bodyPr wrap="square"/>
+                    <a:lstStyle/>
+                    <a:p>
+                      <a:pPr algn="r">
+                        <a:defRPr sz="750"/>
+                      </a:pPr>
+                      <a:r>
+                        <a:rPr sz="750" b="0">
+                          <a:solidFill>
+                            <a:srgbClr val="202124"/>
+                          </a:solidFill>
+                          <a:latin typeface="Google Sans Flex"/>
+                        </a:rPr>
+                        <a:t>2,050</a:t>
+                      </a:r>
+                    </a:p>
+                  </a:txBody>
+                  <a:tcPr marL="45720" marR="45720" marT="9144" marB="9144" anchor="ctr">
+                    <a:solidFill>
+                      <a:srgbClr val="FFFFFF"/>
+                    </a:solidFill>
+                    <a:lnL w="0">
+                      <a:noFill/>
+                    </a:lnL>
+                    <a:lnR w="0">
+                      <a:noFill/>
+                    </a:lnR>
+                    <a:lnT w="0">
+                      <a:noFill/>
+                    </a:lnT>
+                    <a:lnB w="6350">
+                      <a:solidFill>
+                        <a:srgbClr val="DADCE0"/>
+                      </a:solidFill>
+                    </a:lnB>
+                  </a:tcPr>
+                </a:tc>
+                <a:tc>
+                  <a:txBody>
+                    <a:bodyPr wrap="square"/>
+                    <a:lstStyle/>
+                    <a:p>
+                      <a:pPr algn="r">
+                        <a:defRPr sz="750"/>
+                      </a:pPr>
+                      <a:r>
+                        <a:rPr sz="750" b="0">
+                          <a:solidFill>
+                            <a:srgbClr val="202124"/>
+                          </a:solidFill>
+                          <a:latin typeface="Google Sans Flex"/>
+                        </a:rPr>
+                        <a:t>$0.0041</a:t>
+                      </a:r>
+                    </a:p>
+                  </a:txBody>
+                  <a:tcPr marL="45720" marR="45720" marT="9144" marB="9144" anchor="ctr">
+                    <a:solidFill>
+                      <a:srgbClr val="FFFFFF"/>
+                    </a:solidFill>
+                    <a:lnL w="0">
+                      <a:noFill/>
+                    </a:lnL>
+                    <a:lnR w="0">
+                      <a:noFill/>
+                    </a:lnR>
+                    <a:lnT w="0">
+                      <a:noFill/>
+                    </a:lnT>
+                    <a:lnB w="6350">
+                      <a:solidFill>
+                        <a:srgbClr val="DADCE0"/>
+                      </a:solidFill>
+                    </a:lnB>
+                  </a:tcPr>
+                </a:tc>
+              </a:tr>
+              <a:tr h="187452">
+                <a:tc>
+                  <a:txBody>
+                    <a:bodyPr wrap="square"/>
+                    <a:lstStyle/>
+                    <a:p>
+                      <a:pPr algn="l">
+                        <a:defRPr sz="750"/>
+                      </a:pPr>
+                      <a:r>
+                        <a:rPr sz="750" b="0">
+                          <a:solidFill>
+                            <a:srgbClr val="202124"/>
+                          </a:solidFill>
+                          <a:latin typeface="Google Sans Flex"/>
+                        </a:rPr>
+                        <a:t>Claim review (agent)</a:t>
+                      </a:r>
+                    </a:p>
+                  </a:txBody>
+                  <a:tcPr marL="45720" marR="45720" marT="9144" marB="9144" anchor="ctr">
+                    <a:solidFill>
+                      <a:srgbClr val="FFFFFF"/>
+                    </a:solidFill>
+                    <a:lnL w="0">
+                      <a:noFill/>
+                    </a:lnL>
+                    <a:lnR w="0">
+                      <a:noFill/>
+                    </a:lnR>
+                    <a:lnT w="0">
+                      <a:noFill/>
+                    </a:lnT>
+                    <a:lnB w="6350">
+                      <a:solidFill>
+                        <a:srgbClr val="DADCE0"/>
+                      </a:solidFill>
+                    </a:lnB>
+                  </a:tcPr>
+                </a:tc>
+                <a:tc>
+                  <a:txBody>
+                    <a:bodyPr wrap="square"/>
+                    <a:lstStyle/>
+                    <a:p>
+                      <a:pPr algn="r">
+                        <a:defRPr sz="750"/>
+                      </a:pPr>
+                      <a:r>
+                        <a:rPr sz="750" b="0">
+                          <a:solidFill>
+                            <a:srgbClr val="202124"/>
+                          </a:solidFill>
+                          <a:latin typeface="Google Sans Flex"/>
+                        </a:rPr>
+                        <a:t>10.4 s p50</a:t>
+                      </a:r>
+                    </a:p>
+                  </a:txBody>
+                  <a:tcPr marL="45720" marR="45720" marT="9144" marB="9144" anchor="ctr">
+                    <a:solidFill>
+                      <a:srgbClr val="FFFFFF"/>
+                    </a:solidFill>
+                    <a:lnL w="0">
+                      <a:noFill/>
+                    </a:lnL>
+                    <a:lnR w="0">
+                      <a:noFill/>
+                    </a:lnR>
+                    <a:lnT w="0">
+                      <a:noFill/>
+                    </a:lnT>
+                    <a:lnB w="6350">
+                      <a:solidFill>
+                        <a:srgbClr val="DADCE0"/>
+                      </a:solidFill>
+                    </a:lnB>
+                  </a:tcPr>
+                </a:tc>
+                <a:tc>
+                  <a:txBody>
+                    <a:bodyPr wrap="square"/>
+                    <a:lstStyle/>
+                    <a:p>
+                      <a:pPr algn="r">
+                        <a:defRPr sz="750"/>
+                      </a:pPr>
+                      <a:r>
+                        <a:rPr sz="750" b="0">
+                          <a:solidFill>
+                            <a:srgbClr val="202124"/>
+                          </a:solidFill>
+                          <a:latin typeface="Google Sans Flex"/>
+                        </a:rPr>
+                        <a:t>15.0 s / 44.8 s</a:t>
+                      </a:r>
+                    </a:p>
+                  </a:txBody>
+                  <a:tcPr marL="45720" marR="45720" marT="9144" marB="9144" anchor="ctr">
+                    <a:solidFill>
+                      <a:srgbClr val="FFFFFF"/>
+                    </a:solidFill>
+                    <a:lnL w="0">
+                      <a:noFill/>
+                    </a:lnL>
+                    <a:lnR w="0">
+                      <a:noFill/>
+                    </a:lnR>
+                    <a:lnT w="0">
+                      <a:noFill/>
+                    </a:lnT>
+                    <a:lnB w="6350">
+                      <a:solidFill>
+                        <a:srgbClr val="DADCE0"/>
+                      </a:solidFill>
+                    </a:lnB>
+                  </a:tcPr>
+                </a:tc>
+                <a:tc>
+                  <a:txBody>
+                    <a:bodyPr wrap="square"/>
+                    <a:lstStyle/>
+                    <a:p>
+                      <a:pPr algn="r">
+                        <a:defRPr sz="750"/>
+                      </a:pPr>
+                      <a:r>
+                        <a:rPr sz="750" b="0">
+                          <a:solidFill>
+                            <a:srgbClr val="202124"/>
+                          </a:solidFill>
+                          <a:latin typeface="Google Sans Flex"/>
+                        </a:rPr>
+                        <a:t>5,965</a:t>
+                      </a:r>
+                    </a:p>
+                  </a:txBody>
+                  <a:tcPr marL="45720" marR="45720" marT="9144" marB="9144" anchor="ctr">
+                    <a:solidFill>
+                      <a:srgbClr val="FFFFFF"/>
+                    </a:solidFill>
+                    <a:lnL w="0">
+                      <a:noFill/>
+                    </a:lnL>
+                    <a:lnR w="0">
+                      <a:noFill/>
+                    </a:lnR>
+                    <a:lnT w="0">
+                      <a:noFill/>
+                    </a:lnT>
+                    <a:lnB w="6350">
+                      <a:solidFill>
+                        <a:srgbClr val="DADCE0"/>
+                      </a:solidFill>
+                    </a:lnB>
+                  </a:tcPr>
+                </a:tc>
+                <a:tc>
+                  <a:txBody>
+                    <a:bodyPr wrap="square"/>
+                    <a:lstStyle/>
+                    <a:p>
+                      <a:pPr algn="r">
+                        <a:defRPr sz="750"/>
+                      </a:pPr>
+                      <a:r>
+                        <a:rPr sz="750" b="0">
+                          <a:solidFill>
+                            <a:srgbClr val="202124"/>
+                          </a:solidFill>
+                          <a:latin typeface="Google Sans Flex"/>
+                        </a:rPr>
+                        <a:t>$0.0123</a:t>
+                      </a:r>
+                    </a:p>
+                  </a:txBody>
+                  <a:tcPr marL="45720" marR="45720" marT="9144" marB="9144" anchor="ctr">
+                    <a:solidFill>
+                      <a:srgbClr val="FFFFFF"/>
+                    </a:solidFill>
+                    <a:lnL w="0">
+                      <a:noFill/>
+                    </a:lnL>
+                    <a:lnR w="0">
+                      <a:noFill/>
+                    </a:lnR>
+                    <a:lnT w="0">
+                      <a:noFill/>
+                    </a:lnT>
+                    <a:lnB w="6350">
+                      <a:solidFill>
+                        <a:srgbClr val="DADCE0"/>
+                      </a:solidFill>
+                    </a:lnB>
+                  </a:tcPr>
+                </a:tc>
+              </a:tr>
+              <a:tr h="187452">
+                <a:tc>
+                  <a:txBody>
+                    <a:bodyPr wrap="square"/>
+                    <a:lstStyle/>
+                    <a:p>
+                      <a:pPr algn="l">
+                        <a:defRPr sz="750"/>
+                      </a:pPr>
+                      <a:r>
+                        <a:rPr sz="750" b="0">
+                          <a:solidFill>
+                            <a:srgbClr val="202124"/>
+                          </a:solidFill>
+                          <a:latin typeface="Google Sans Flex"/>
+                        </a:rPr>
+                        <a:t>GCash receipt read</a:t>
+                      </a:r>
+                    </a:p>
+                  </a:txBody>
+                  <a:tcPr marL="45720" marR="45720" marT="9144" marB="9144" anchor="ctr">
+                    <a:solidFill>
+                      <a:srgbClr val="FFFFFF"/>
+                    </a:solidFill>
+                    <a:lnL w="0">
+                      <a:noFill/>
+                    </a:lnL>
+                    <a:lnR w="0">
+                      <a:noFill/>
+                    </a:lnR>
+                    <a:lnT w="0">
+                      <a:noFill/>
+                    </a:lnT>
+                    <a:lnB w="6350">
+                      <a:solidFill>
+                        <a:srgbClr val="DADCE0"/>
+                      </a:solidFill>
+                    </a:lnB>
+                  </a:tcPr>
+                </a:tc>
+                <a:tc>
+                  <a:txBody>
+                    <a:bodyPr wrap="square"/>
+                    <a:lstStyle/>
+                    <a:p>
+                      <a:pPr algn="r">
+                        <a:defRPr sz="750"/>
+                      </a:pPr>
+                      <a:r>
+                        <a:rPr sz="750" b="0">
+                          <a:solidFill>
+                            <a:srgbClr val="202124"/>
+                          </a:solidFill>
+                          <a:latin typeface="Google Sans Flex"/>
+                        </a:rPr>
+                        <a:t>–</a:t>
+                      </a:r>
+                    </a:p>
+                  </a:txBody>
+                  <a:tcPr marL="45720" marR="45720" marT="9144" marB="9144" anchor="ctr">
+                    <a:solidFill>
+                      <a:srgbClr val="FFFFFF"/>
+                    </a:solidFill>
+                    <a:lnL w="0">
+                      <a:noFill/>
+                    </a:lnL>
+                    <a:lnR w="0">
+                      <a:noFill/>
+                    </a:lnR>
+                    <a:lnT w="0">
+                      <a:noFill/>
+                    </a:lnT>
+                    <a:lnB w="6350">
+                      <a:solidFill>
+                        <a:srgbClr val="DADCE0"/>
+                      </a:solidFill>
+                    </a:lnB>
+                  </a:tcPr>
+                </a:tc>
+                <a:tc>
+                  <a:txBody>
+                    <a:bodyPr wrap="square"/>
+                    <a:lstStyle/>
+                    <a:p>
+                      <a:pPr algn="r">
+                        <a:defRPr sz="750"/>
+                      </a:pPr>
+                      <a:r>
+                        <a:rPr sz="750" b="0">
+                          <a:solidFill>
+                            <a:srgbClr val="202124"/>
+                          </a:solidFill>
+                          <a:latin typeface="Google Sans Flex"/>
+                        </a:rPr>
+                        <a:t>3.4 s / 11.9 s</a:t>
+                      </a:r>
+                    </a:p>
+                  </a:txBody>
+                  <a:tcPr marL="45720" marR="45720" marT="9144" marB="9144" anchor="ctr">
+                    <a:solidFill>
+                      <a:srgbClr val="FFFFFF"/>
+                    </a:solidFill>
+                    <a:lnL w="0">
+                      <a:noFill/>
+                    </a:lnL>
+                    <a:lnR w="0">
+                      <a:noFill/>
+                    </a:lnR>
+                    <a:lnT w="0">
+                      <a:noFill/>
+                    </a:lnT>
+                    <a:lnB w="6350">
+                      <a:solidFill>
+                        <a:srgbClr val="DADCE0"/>
+                      </a:solidFill>
+                    </a:lnB>
+                  </a:tcPr>
+                </a:tc>
+                <a:tc>
+                  <a:txBody>
+                    <a:bodyPr wrap="square"/>
+                    <a:lstStyle/>
+                    <a:p>
+                      <a:pPr algn="r">
+                        <a:defRPr sz="750"/>
+                      </a:pPr>
+                      <a:r>
+                        <a:rPr sz="750" b="0">
+                          <a:solidFill>
+                            <a:srgbClr val="202124"/>
+                          </a:solidFill>
+                          <a:latin typeface="Google Sans Flex"/>
+                        </a:rPr>
+                        <a:t>1,918</a:t>
+                      </a:r>
+                    </a:p>
+                  </a:txBody>
+                  <a:tcPr marL="45720" marR="45720" marT="9144" marB="9144" anchor="ctr">
+                    <a:solidFill>
+                      <a:srgbClr val="FFFFFF"/>
+                    </a:solidFill>
+                    <a:lnL w="0">
+                      <a:noFill/>
+                    </a:lnL>
+                    <a:lnR w="0">
+                      <a:noFill/>
+                    </a:lnR>
+                    <a:lnT w="0">
+                      <a:noFill/>
+                    </a:lnT>
+                    <a:lnB w="6350">
+                      <a:solidFill>
+                        <a:srgbClr val="DADCE0"/>
+                      </a:solidFill>
+                    </a:lnB>
+                  </a:tcPr>
+                </a:tc>
+                <a:tc>
+                  <a:txBody>
+                    <a:bodyPr wrap="square"/>
+                    <a:lstStyle/>
+                    <a:p>
+                      <a:pPr algn="r">
+                        <a:defRPr sz="750"/>
+                      </a:pPr>
+                      <a:r>
+                        <a:rPr sz="750" b="0">
+                          <a:solidFill>
+                            <a:srgbClr val="202124"/>
+                          </a:solidFill>
+                          <a:latin typeface="Google Sans Flex"/>
+                        </a:rPr>
+                        <a:t>$0.0044</a:t>
+                      </a:r>
+                    </a:p>
+                  </a:txBody>
+                  <a:tcPr marL="45720" marR="45720" marT="9144" marB="9144" anchor="ctr">
+                    <a:solidFill>
+                      <a:srgbClr val="FFFFFF"/>
+                    </a:solidFill>
+                    <a:lnL w="0">
+                      <a:noFill/>
+                    </a:lnL>
+                    <a:lnR w="0">
+                      <a:noFill/>
+                    </a:lnR>
+                    <a:lnT w="0">
+                      <a:noFill/>
+                    </a:lnT>
+                    <a:lnB w="6350">
+                      <a:solidFill>
+                        <a:srgbClr val="DADCE0"/>
+                      </a:solidFill>
+                    </a:lnB>
+                  </a:tcPr>
+                </a:tc>
+              </a:tr>
+              <a:tr h="187452">
+                <a:tc>
+                  <a:txBody>
+                    <a:bodyPr wrap="square"/>
+                    <a:lstStyle/>
+                    <a:p>
+                      <a:pPr algn="l">
+                        <a:defRPr sz="750"/>
+                      </a:pPr>
+                      <a:r>
+                        <a:rPr sz="750" b="0">
+                          <a:solidFill>
+                            <a:srgbClr val="202124"/>
+                          </a:solidFill>
+                          <a:latin typeface="Google Sans Flex"/>
+                        </a:rPr>
+                        <a:t>AI customer (Flash-Lite)</a:t>
+                      </a:r>
+                    </a:p>
+                  </a:txBody>
+                  <a:tcPr marL="45720" marR="45720" marT="9144" marB="9144" anchor="ctr">
+                    <a:solidFill>
+                      <a:srgbClr val="FFFFFF"/>
+                    </a:solidFill>
+                    <a:lnL w="0">
+                      <a:noFill/>
+                    </a:lnL>
+                    <a:lnR w="0">
+                      <a:noFill/>
+                    </a:lnR>
+                    <a:lnT w="0">
+                      <a:noFill/>
+                    </a:lnT>
+                    <a:lnB w="6350">
+                      <a:solidFill>
+                        <a:srgbClr val="DADCE0"/>
+                      </a:solidFill>
+                    </a:lnB>
+                  </a:tcPr>
+                </a:tc>
+                <a:tc>
+                  <a:txBody>
+                    <a:bodyPr wrap="square"/>
+                    <a:lstStyle/>
+                    <a:p>
+                      <a:pPr algn="r">
+                        <a:defRPr sz="750"/>
+                      </a:pPr>
+                      <a:r>
+                        <a:rPr sz="750" b="0">
+                          <a:solidFill>
+                            <a:srgbClr val="202124"/>
+                          </a:solidFill>
+                          <a:latin typeface="Google Sans Flex"/>
+                        </a:rPr>
+                        <a:t>1.2 s / 1.3 s</a:t>
+                      </a:r>
+                    </a:p>
+                  </a:txBody>
+                  <a:tcPr marL="45720" marR="45720" marT="9144" marB="9144" anchor="ctr">
+                    <a:solidFill>
+                      <a:srgbClr val="FFFFFF"/>
+                    </a:solidFill>
+                    <a:lnL w="0">
+                      <a:noFill/>
+                    </a:lnL>
+                    <a:lnR w="0">
+                      <a:noFill/>
+                    </a:lnR>
+                    <a:lnT w="0">
+                      <a:noFill/>
+                    </a:lnT>
+                    <a:lnB w="6350">
+                      <a:solidFill>
+                        <a:srgbClr val="DADCE0"/>
+                      </a:solidFill>
+                    </a:lnB>
+                  </a:tcPr>
+                </a:tc>
+                <a:tc>
+                  <a:txBody>
+                    <a:bodyPr wrap="square"/>
+                    <a:lstStyle/>
+                    <a:p>
+                      <a:pPr algn="r">
+                        <a:defRPr sz="750"/>
+                      </a:pPr>
+                      <a:r>
+                        <a:rPr sz="750" b="0">
+                          <a:solidFill>
+                            <a:srgbClr val="202124"/>
+                          </a:solidFill>
+                          <a:latin typeface="Google Sans Flex"/>
+                        </a:rPr>
+                        <a:t>–</a:t>
+                      </a:r>
+                    </a:p>
+                  </a:txBody>
+                  <a:tcPr marL="45720" marR="45720" marT="9144" marB="9144" anchor="ctr">
+                    <a:solidFill>
+                      <a:srgbClr val="FFFFFF"/>
+                    </a:solidFill>
+                    <a:lnL w="0">
+                      <a:noFill/>
+                    </a:lnL>
+                    <a:lnR w="0">
+                      <a:noFill/>
+                    </a:lnR>
+                    <a:lnT w="0">
+                      <a:noFill/>
+                    </a:lnT>
+                    <a:lnB w="6350">
+                      <a:solidFill>
+                        <a:srgbClr val="DADCE0"/>
+                      </a:solidFill>
+                    </a:lnB>
+                  </a:tcPr>
+                </a:tc>
+                <a:tc>
+                  <a:txBody>
+                    <a:bodyPr wrap="square"/>
+                    <a:lstStyle/>
+                    <a:p>
+                      <a:pPr algn="r">
+                        <a:defRPr sz="750"/>
+                      </a:pPr>
+                      <a:r>
+                        <a:rPr sz="750" b="0">
+                          <a:solidFill>
+                            <a:srgbClr val="202124"/>
+                          </a:solidFill>
+                          <a:latin typeface="Google Sans Flex"/>
+                        </a:rPr>
+                        <a:t>–</a:t>
+                      </a:r>
+                    </a:p>
+                  </a:txBody>
+                  <a:tcPr marL="45720" marR="45720" marT="9144" marB="9144" anchor="ctr">
+                    <a:solidFill>
+                      <a:srgbClr val="FFFFFF"/>
+                    </a:solidFill>
+                    <a:lnL w="0">
+                      <a:noFill/>
+                    </a:lnL>
+                    <a:lnR w="0">
+                      <a:noFill/>
+                    </a:lnR>
+                    <a:lnT w="0">
+                      <a:noFill/>
+                    </a:lnT>
+                    <a:lnB w="6350">
+                      <a:solidFill>
+                        <a:srgbClr val="DADCE0"/>
+                      </a:solidFill>
+                    </a:lnB>
+                  </a:tcPr>
+                </a:tc>
+                <a:tc>
+                  <a:txBody>
+                    <a:bodyPr wrap="square"/>
+                    <a:lstStyle/>
+                    <a:p>
+                      <a:pPr algn="r">
+                        <a:defRPr sz="750"/>
+                      </a:pPr>
+                      <a:r>
+                        <a:rPr sz="750" b="0">
+                          <a:solidFill>
+                            <a:srgbClr val="202124"/>
+                          </a:solidFill>
+                          <a:latin typeface="Google Sans Flex"/>
+                        </a:rPr>
+                        <a:t>–</a:t>
+                      </a:r>
+                    </a:p>
+                  </a:txBody>
+                  <a:tcPr marL="45720" marR="45720" marT="9144" marB="9144" anchor="ctr">
+                    <a:solidFill>
+                      <a:srgbClr val="FFFFFF"/>
+                    </a:solidFill>
+                    <a:lnL w="0">
+                      <a:noFill/>
+                    </a:lnL>
+                    <a:lnR w="0">
+                      <a:noFill/>
+                    </a:lnR>
+                    <a:lnT w="0">
+                      <a:noFill/>
+                    </a:lnT>
+                    <a:lnB w="6350">
+                      <a:solidFill>
+                        <a:srgbClr val="DADCE0"/>
+                      </a:solidFill>
+                    </a:lnB>
+                  </a:tcPr>
+                </a:tc>
+              </a:tr>
+            </a:tbl>
+          </a:graphicData>
+        </a:graphic>
+      </p:graphicFrame>
+      <p:sp>
+        <p:nvSpPr>
+          <p:cNvPr id="153" name="Throughput note"/>
+          <p:cNvSpPr txBox="1"/>
+          <p:nvPr/>
+        </p:nvSpPr>
+        <p:spPr>
+          <a:xfrm>
+            <a:off x="347472" y="3685032"/>
+            <a:ext cx="8449056" cy="182880"/>
+          </a:xfrm>
+          <a:prstGeom prst="rect">
+            <a:avLst/>
+          </a:prstGeom>
+          <a:noFill/>
+        </p:spPr>
+        <p:txBody>
+          <a:bodyPr wrap="square" anchor="t" lIns="0" rIns="0" tIns="0" bIns="0">
+            <a:spAutoFit/>
+          </a:bodyPr>
+          <a:lstStyle/>
+          <a:p>
+            <a:pPr algn="l"/>
+            <a:r>
+              <a:rPr sz="750" b="1">
+                <a:solidFill>
+                  <a:srgbClr val="202124"/>
+                </a:solidFill>
+                <a:latin typeface="Google Sans Flex"/>
+              </a:rPr>
+              <a:t>Without AI: </a:t>
+            </a:r>
+            <a:r>
+              <a:rPr sz="750" b="0">
+                <a:solidFill>
+                  <a:srgbClr val="5F6368"/>
+                </a:solidFill>
+                <a:latin typeface="Google Sans Flex"/>
+              </a:rPr>
+              <a:t>pages 0.2 s–0.5 s p50; one warm 1-vCPU instance served 11.5 req/s at 10 concurrent users and 13.3 at 25, 0 errors in 600 requests.</a:t>
+            </a:r>
+          </a:p>
+        </p:txBody>
+      </p:sp>
+      <p:sp>
+        <p:nvSpPr>
+          <p:cNvPr id="154" name="Card Environment and method"/>
+          <p:cNvSpPr/>
+          <p:nvPr/>
+        </p:nvSpPr>
+        <p:spPr>
+          <a:xfrm>
+            <a:off x="347472" y="3922776"/>
+            <a:ext cx="2743200" cy="1024128"/>
+          </a:xfrm>
+          <a:prstGeom prst="roundRect">
+            <a:avLst>
+              <a:gd name="adj" fmla="val 8000"/>
+            </a:avLst>
+          </a:prstGeom>
+          <a:solidFill>
+            <a:srgbClr val="F1F3F4"/>
+          </a:solidFill>
+          <a:ln>
+            <a:noFill/>
+          </a:ln>
+        </p:spPr>
+        <p:txBody>
+          <a:bodyPr rtlCol="0" anchor="t" wrap="square" lIns="64008" rIns="64008" tIns="64008" bIns="64008"/>
+          <a:lstStyle/>
+          <a:p>
+            <a:pPr algn="l"/>
+            <a:r>
+              <a:rPr sz="800" b="0">
+                <a:solidFill>
+                  <a:srgbClr val="202124"/>
+                </a:solidFill>
+                <a:latin typeface="Google Sans Flex Medium"/>
+              </a:rPr>
+              <a:t>Environment and method</a:t>
+            </a:r>
+          </a:p>
+          <a:p>
+            <a:pPr algn="l">
+              <a:spcBef>
+                <a:spcPts val="200"/>
+              </a:spcBef>
+            </a:pPr>
+            <a:r>
+              <a:rPr sz="650" b="1">
+                <a:solidFill>
+                  <a:srgbClr val="202124"/>
+                </a:solidFill>
+                <a:latin typeface="Google Sans Flex"/>
+              </a:rPr>
+              <a:t>App: </a:t>
+            </a:r>
+            <a:r>
+              <a:rPr sz="650" b="0">
+                <a:solidFill>
+                  <a:srgbClr val="202124"/>
+                </a:solidFill>
+                <a:latin typeface="Google Sans Flex"/>
+              </a:rPr>
+              <a:t>Cloud Run asia-southeast1, 1 vCPU, 512 MiB, 1 warm instance; Firestore, Cloud Storage; Firebase Hosting.</a:t>
+            </a:r>
+          </a:p>
+          <a:p>
+            <a:pPr algn="l">
+              <a:spcBef>
+                <a:spcPts val="200"/>
+              </a:spcBef>
+            </a:pPr>
+            <a:r>
+              <a:rPr sz="650" b="1">
+                <a:solidFill>
+                  <a:srgbClr val="202124"/>
+                </a:solidFill>
+                <a:latin typeface="Google Sans Flex"/>
+              </a:rPr>
+              <a:t>Live: </a:t>
+            </a:r>
+            <a:r>
+              <a:rPr sz="650" b="0">
+                <a:solidFill>
+                  <a:srgbClr val="202124"/>
+                </a:solidFill>
+                <a:latin typeface="Google Sans Flex"/>
+              </a:rPr>
+              <a:t>a laptop over the internet as new demo visitors; AI actions 5× each on fresh visitors, pages 20×, 200 requests at 1/10/25 users.</a:t>
+            </a:r>
+          </a:p>
+          <a:p>
+            <a:pPr algn="l">
+              <a:spcBef>
+                <a:spcPts val="200"/>
+              </a:spcBef>
+            </a:pPr>
+            <a:r>
+              <a:rPr sz="650" b="1">
+                <a:solidFill>
+                  <a:srgbClr val="202124"/>
+                </a:solidFill>
+                <a:latin typeface="Google Sans Flex"/>
+              </a:rPr>
+              <a:t>Tokens: </a:t>
+            </a:r>
+            <a:r>
+              <a:rPr sz="650" b="0">
+                <a:solidFill>
+                  <a:srgbClr val="202124"/>
+                </a:solidFill>
+                <a:latin typeface="Google Sans Flex"/>
+              </a:rPr>
+              <a:t>Vertex usage metadata, thinking included, at list price $1.50 / $7.50 per 1M in / out.</a:t>
+            </a:r>
+          </a:p>
+        </p:txBody>
+      </p:sp>
+      <p:sp>
+        <p:nvSpPr>
+          <p:cNvPr id="155" name="Card Constraints we hit"/>
+          <p:cNvSpPr/>
+          <p:nvPr/>
+        </p:nvSpPr>
+        <p:spPr>
+          <a:xfrm>
+            <a:off x="3200400" y="3922776"/>
+            <a:ext cx="2743200" cy="1024128"/>
+          </a:xfrm>
+          <a:prstGeom prst="roundRect">
+            <a:avLst>
+              <a:gd name="adj" fmla="val 8000"/>
+            </a:avLst>
+          </a:prstGeom>
+          <a:solidFill>
+            <a:srgbClr val="F1F3F4"/>
+          </a:solidFill>
+          <a:ln>
+            <a:noFill/>
+          </a:ln>
+        </p:spPr>
+        <p:txBody>
+          <a:bodyPr rtlCol="0" anchor="t" wrap="square" lIns="64008" rIns="64008" tIns="64008" bIns="64008"/>
+          <a:lstStyle/>
+          <a:p>
+            <a:pPr algn="l"/>
+            <a:r>
+              <a:rPr sz="800" b="0">
+                <a:solidFill>
+                  <a:srgbClr val="202124"/>
+                </a:solidFill>
+                <a:latin typeface="Google Sans Flex Medium"/>
+              </a:rPr>
+              <a:t>Constraints we hit</a:t>
+            </a:r>
+          </a:p>
+          <a:p>
+            <a:pPr algn="l">
+              <a:spcBef>
+                <a:spcPts val="200"/>
+              </a:spcBef>
+            </a:pPr>
+            <a:r>
+              <a:rPr sz="650" b="1">
+                <a:solidFill>
+                  <a:srgbClr val="202124"/>
+                </a:solidFill>
+                <a:latin typeface="Google Sans Flex"/>
+              </a:rPr>
+              <a:t>Quotas: </a:t>
+            </a:r>
+            <a:r>
+              <a:rPr sz="650" b="0">
+                <a:solidFill>
+                  <a:srgbClr val="202124"/>
+                </a:solidFill>
+                <a:latin typeface="Google Sans Flex"/>
+              </a:rPr>
+              <a:t>Vertex AI pay-as-you-go, default quotas; no free-tier or raised limits assumed.</a:t>
+            </a:r>
+          </a:p>
+          <a:p>
+            <a:pPr algn="l">
+              <a:spcBef>
+                <a:spcPts val="200"/>
+              </a:spcBef>
+            </a:pPr>
+            <a:r>
+              <a:rPr sz="650" b="1">
+                <a:solidFill>
+                  <a:srgbClr val="202124"/>
+                </a:solidFill>
+                <a:latin typeface="Google Sans Flex"/>
+              </a:rPr>
+              <a:t>429: </a:t>
+            </a:r>
+            <a:r>
+              <a:rPr sz="650" b="0">
+                <a:solidFill>
+                  <a:srgbClr val="202124"/>
+                </a:solidFill>
+                <a:latin typeface="Google Sans Flex"/>
+              </a:rPr>
+              <a:t>8 parallel eval workers hit RESOURCE_EXHAUSTED, so evals run 4 at a time.</a:t>
+            </a:r>
+          </a:p>
+          <a:p>
+            <a:pPr algn="l">
+              <a:spcBef>
+                <a:spcPts val="200"/>
+              </a:spcBef>
+            </a:pPr>
+            <a:r>
+              <a:rPr sz="650" b="1">
+                <a:solidFill>
+                  <a:srgbClr val="202124"/>
+                </a:solidFill>
+                <a:latin typeface="Google Sans Flex"/>
+              </a:rPr>
+              <a:t>504: </a:t>
+            </a:r>
+            <a:r>
+              <a:rPr sz="650" b="0">
+                <a:solidFill>
+                  <a:srgbClr val="202124"/>
+                </a:solidFill>
+                <a:latin typeface="Google Sans Flex"/>
+              </a:rPr>
+              <a:t>Vertex sometimes times out under load: a 90 s timeout per call, one retry on chat actions; demo capped at 5,000 AI calls a day.</a:t>
+            </a:r>
+          </a:p>
+        </p:txBody>
+      </p:sp>
+      <p:sp>
+        <p:nvSpPr>
+          <p:cNvPr id="156" name="Card How we keep it fast"/>
+          <p:cNvSpPr/>
+          <p:nvPr/>
+        </p:nvSpPr>
+        <p:spPr>
+          <a:xfrm>
+            <a:off x="6053328" y="3922776"/>
+            <a:ext cx="2743200" cy="1024128"/>
+          </a:xfrm>
+          <a:prstGeom prst="roundRect">
+            <a:avLst>
+              <a:gd name="adj" fmla="val 8000"/>
+            </a:avLst>
+          </a:prstGeom>
+          <a:solidFill>
+            <a:srgbClr val="F1F3F4"/>
+          </a:solidFill>
+          <a:ln>
+            <a:noFill/>
+          </a:ln>
+        </p:spPr>
+        <p:txBody>
+          <a:bodyPr rtlCol="0" anchor="t" wrap="square" lIns="64008" rIns="64008" tIns="64008" bIns="64008"/>
+          <a:lstStyle/>
+          <a:p>
+            <a:pPr algn="l"/>
+            <a:r>
+              <a:rPr sz="800" b="0">
+                <a:solidFill>
+                  <a:srgbClr val="202124"/>
+                </a:solidFill>
+                <a:latin typeface="Google Sans Flex Medium"/>
+              </a:rPr>
+              <a:t>How we keep it fast</a:t>
+            </a:r>
+          </a:p>
+          <a:p>
+            <a:pPr algn="l">
+              <a:spcBef>
+                <a:spcPts val="200"/>
+              </a:spcBef>
+            </a:pPr>
+            <a:r>
+              <a:rPr sz="650" b="0">
+                <a:solidFill>
+                  <a:srgbClr val="202124"/>
+                </a:solidFill>
+                <a:latin typeface="Google Sans Flex"/>
+              </a:rPr>
+              <a:t>Checks run once per new customer message and are stored; briefs are cached; the claim agent runs on low thinking.</a:t>
+            </a:r>
+          </a:p>
+          <a:p>
+            <a:pPr algn="l">
+              <a:spcBef>
+                <a:spcPts val="200"/>
+              </a:spcBef>
+            </a:pPr>
+            <a:r>
+              <a:rPr sz="650" b="0">
+                <a:solidFill>
+                  <a:srgbClr val="202124"/>
+                </a:solidFill>
+                <a:latin typeface="Google Sans Flex"/>
+              </a:rPr>
+              <a:t>AI calls go straight to Cloud Run (300 s), past Hosting's 60 s limit; 1 warm instance, 30 requests each.</a:t>
+            </a:r>
           </a:p>
         </p:txBody>
       </p:sp>
